--- a/output_pptx/Great_Is_Thy_Faithfulness.pptx
+++ b/output_pptx/Great_Is_Thy_Faithfulness.pptx
@@ -28,6 +28,13 @@
     <p:sldId id="276" r:id="rId27"/>
     <p:sldId id="277" r:id="rId28"/>
     <p:sldId id="278" r:id="rId29"/>
+    <p:sldId id="279" r:id="rId30"/>
+    <p:sldId id="280" r:id="rId31"/>
+    <p:sldId id="281" r:id="rId32"/>
+    <p:sldId id="282" r:id="rId33"/>
+    <p:sldId id="283" r:id="rId34"/>
+    <p:sldId id="284" r:id="rId35"/>
+    <p:sldId id="285" r:id="rId36"/>
   </p:sldIdLst>
   <p:sldSz cx="12191695" cy="6858000" type="screen4x3"/>
   <p:notesSz cx="6858000" cy="9144000"/>
@@ -3126,23 +3133,23 @@
         </p:nvSpPr>
         <p:spPr>
           <a:xfrm>
-            <a:off x="594360" y="1837944"/>
-            <a:ext cx="11002975" cy="685800"/>
-          </a:xfrm>
-          <a:prstGeom prst="rect">
-            <a:avLst/>
-          </a:prstGeom>
-          <a:noFill/>
-        </p:spPr>
-        <p:txBody>
-          <a:bodyPr wrap="square">
-            <a:spAutoFit/>
-          </a:bodyPr>
-          <a:lstStyle/>
-          <a:p>
-            <a:pPr algn="ctr"/>
-            <a:r>
-              <a:rPr sz="4400" b="1" i="0">
+            <a:off x="640080" y="1650492"/>
+            <a:ext cx="10911535" cy="731520"/>
+          </a:xfrm>
+          <a:prstGeom prst="rect">
+            <a:avLst/>
+          </a:prstGeom>
+          <a:noFill/>
+        </p:spPr>
+        <p:txBody>
+          <a:bodyPr wrap="square">
+            <a:spAutoFit/>
+          </a:bodyPr>
+          <a:lstStyle/>
+          <a:p>
+            <a:pPr algn="ctr"/>
+            <a:r>
+              <a:rPr sz="4800" b="1" i="0">
                 <a:solidFill>
                   <a:srgbClr val="FFFFFF"/>
                 </a:solidFill>
@@ -3161,8 +3168,8 @@
         </p:nvSpPr>
         <p:spPr>
           <a:xfrm>
-            <a:off x="594360" y="2560320"/>
-            <a:ext cx="11002975" cy="384048"/>
+            <a:off x="640080" y="2418588"/>
+            <a:ext cx="10911535" cy="365760"/>
           </a:xfrm>
           <a:prstGeom prst="rect">
             <a:avLst/>
@@ -3179,7 +3186,7 @@
             <a:r>
               <a:rPr sz="2400" b="0" i="1">
                 <a:solidFill>
-                  <a:srgbClr val="B4B4B4"/>
+                  <a:srgbClr val="AAAAAA"/>
                 </a:solidFill>
                 <a:latin typeface="Arial"/>
               </a:rPr>
@@ -3196,8 +3203,78 @@
         </p:nvSpPr>
         <p:spPr>
           <a:xfrm>
-            <a:off x="594360" y="2980944"/>
-            <a:ext cx="11002975" cy="347472"/>
+            <a:off x="640080" y="2985516"/>
+            <a:ext cx="10911535" cy="731520"/>
+          </a:xfrm>
+          <a:prstGeom prst="rect">
+            <a:avLst/>
+          </a:prstGeom>
+          <a:noFill/>
+        </p:spPr>
+        <p:txBody>
+          <a:bodyPr wrap="square">
+            <a:spAutoFit/>
+          </a:bodyPr>
+          <a:lstStyle/>
+          <a:p>
+            <a:pPr algn="ctr"/>
+            <a:r>
+              <a:rPr sz="4800" b="1" i="0">
+                <a:solidFill>
+                  <a:srgbClr val="FFFFFF"/>
+                </a:solidFill>
+                <a:latin typeface="Arial"/>
+              </a:rPr>
+              <a:t>とこしえまで変わらず</a:t>
+            </a:r>
+          </a:p>
+        </p:txBody>
+      </p:sp>
+      <p:sp>
+        <p:nvSpPr>
+          <p:cNvPr id="5" name="TextBox 4"/>
+          <p:cNvSpPr txBox="1"/>
+          <p:nvPr/>
+        </p:nvSpPr>
+        <p:spPr>
+          <a:xfrm>
+            <a:off x="640080" y="3753612"/>
+            <a:ext cx="10911535" cy="365760"/>
+          </a:xfrm>
+          <a:prstGeom prst="rect">
+            <a:avLst/>
+          </a:prstGeom>
+          <a:noFill/>
+        </p:spPr>
+        <p:txBody>
+          <a:bodyPr wrap="square">
+            <a:spAutoFit/>
+          </a:bodyPr>
+          <a:lstStyle/>
+          <a:p>
+            <a:pPr algn="ctr"/>
+            <a:r>
+              <a:rPr sz="2400" b="0" i="1">
+                <a:solidFill>
+                  <a:srgbClr val="AAAAAA"/>
+                </a:solidFill>
+                <a:latin typeface="Arial"/>
+              </a:rPr>
+              <a:t>tokoshie made kawarazu</a:t>
+            </a:r>
+          </a:p>
+        </p:txBody>
+      </p:sp>
+      <p:sp>
+        <p:nvSpPr>
+          <p:cNvPr id="6" name="TextBox 5"/>
+          <p:cNvSpPr txBox="1"/>
+          <p:nvPr/>
+        </p:nvSpPr>
+        <p:spPr>
+          <a:xfrm>
+            <a:off x="640080" y="4530852"/>
+            <a:ext cx="10911535" cy="310896"/>
           </a:xfrm>
           <a:prstGeom prst="rect">
             <a:avLst/>
@@ -3214,81 +3291,11 @@
             <a:r>
               <a:rPr sz="2000" b="0" i="1">
                 <a:solidFill>
-                  <a:srgbClr val="8C8C8C"/>
-                </a:solidFill>
-                <a:latin typeface="Arial"/>
-              </a:rPr>
-              <a:t/>
-            </a:r>
-          </a:p>
-        </p:txBody>
-      </p:sp>
-      <p:sp>
-        <p:nvSpPr>
-          <p:cNvPr id="5" name="TextBox 4"/>
-          <p:cNvSpPr txBox="1"/>
-          <p:nvPr/>
-        </p:nvSpPr>
-        <p:spPr>
-          <a:xfrm>
-            <a:off x="594360" y="3529584"/>
-            <a:ext cx="11002975" cy="685800"/>
-          </a:xfrm>
-          <a:prstGeom prst="rect">
-            <a:avLst/>
-          </a:prstGeom>
-          <a:noFill/>
-        </p:spPr>
-        <p:txBody>
-          <a:bodyPr wrap="square">
-            <a:spAutoFit/>
-          </a:bodyPr>
-          <a:lstStyle/>
-          <a:p>
-            <a:pPr algn="ctr"/>
-            <a:r>
-              <a:rPr sz="4400" b="1" i="0">
-                <a:solidFill>
-                  <a:srgbClr val="FFFFFF"/>
-                </a:solidFill>
-                <a:latin typeface="Arial"/>
-              </a:rPr>
-              <a:t>とこしえまで変わらず</a:t>
-            </a:r>
-          </a:p>
-        </p:txBody>
-      </p:sp>
-      <p:sp>
-        <p:nvSpPr>
-          <p:cNvPr id="6" name="TextBox 5"/>
-          <p:cNvSpPr txBox="1"/>
-          <p:nvPr/>
-        </p:nvSpPr>
-        <p:spPr>
-          <a:xfrm>
-            <a:off x="594360" y="4251960"/>
-            <a:ext cx="11002975" cy="384048"/>
-          </a:xfrm>
-          <a:prstGeom prst="rect">
-            <a:avLst/>
-          </a:prstGeom>
-          <a:noFill/>
-        </p:spPr>
-        <p:txBody>
-          <a:bodyPr wrap="square">
-            <a:spAutoFit/>
-          </a:bodyPr>
-          <a:lstStyle/>
-          <a:p>
-            <a:pPr algn="ctr"/>
-            <a:r>
-              <a:rPr sz="2400" b="0" i="1">
-                <a:solidFill>
-                  <a:srgbClr val="B4B4B4"/>
-                </a:solidFill>
-                <a:latin typeface="Arial"/>
-              </a:rPr>
-              <a:t>tokoshie made kawarazu</a:t>
+                  <a:srgbClr val="828282"/>
+                </a:solidFill>
+                <a:latin typeface="Arial"/>
+              </a:rPr>
+              <a:t>Grande é Tua Fidelidade</a:t>
             </a:r>
           </a:p>
         </p:txBody>
@@ -3301,8 +3308,8 @@
         </p:nvSpPr>
         <p:spPr>
           <a:xfrm>
-            <a:off x="594360" y="4672584"/>
-            <a:ext cx="11002975" cy="347472"/>
+            <a:off x="640080" y="4896612"/>
+            <a:ext cx="10911535" cy="310896"/>
           </a:xfrm>
           <a:prstGeom prst="rect">
             <a:avLst/>
@@ -3319,11 +3326,11 @@
             <a:r>
               <a:rPr sz="2000" b="0" i="1">
                 <a:solidFill>
-                  <a:srgbClr val="8C8C8C"/>
-                </a:solidFill>
-                <a:latin typeface="Arial"/>
-              </a:rPr>
-              <a:t/>
+                  <a:srgbClr val="828282"/>
+                </a:solidFill>
+                <a:latin typeface="Arial"/>
+              </a:rPr>
+              <a:t>Grande é Tua fidelidade, ó Deus meu Pai</a:t>
             </a:r>
           </a:p>
         </p:txBody>
@@ -3362,23 +3369,23 @@
         </p:nvSpPr>
         <p:spPr>
           <a:xfrm>
-            <a:off x="594360" y="2258568"/>
-            <a:ext cx="11002975" cy="685800"/>
-          </a:xfrm>
-          <a:prstGeom prst="rect">
-            <a:avLst/>
-          </a:prstGeom>
-          <a:noFill/>
-        </p:spPr>
-        <p:txBody>
-          <a:bodyPr wrap="square">
-            <a:spAutoFit/>
-          </a:bodyPr>
-          <a:lstStyle/>
-          <a:p>
-            <a:pPr algn="ctr"/>
-            <a:r>
-              <a:rPr sz="4400" b="1" i="0">
+            <a:off x="640080" y="2052828"/>
+            <a:ext cx="10911535" cy="731520"/>
+          </a:xfrm>
+          <a:prstGeom prst="rect">
+            <a:avLst/>
+          </a:prstGeom>
+          <a:noFill/>
+        </p:spPr>
+        <p:txBody>
+          <a:bodyPr wrap="square">
+            <a:spAutoFit/>
+          </a:bodyPr>
+          <a:lstStyle/>
+          <a:p>
+            <a:pPr algn="ctr"/>
+            <a:r>
+              <a:rPr sz="4800" b="1" i="0">
                 <a:solidFill>
                   <a:srgbClr val="FFFFFF"/>
                 </a:solidFill>
@@ -3397,99 +3404,29 @@
         </p:nvSpPr>
         <p:spPr>
           <a:xfrm>
-            <a:off x="594360" y="2980944"/>
-            <a:ext cx="11002975" cy="347472"/>
-          </a:xfrm>
-          <a:prstGeom prst="rect">
-            <a:avLst/>
-          </a:prstGeom>
-          <a:noFill/>
-        </p:spPr>
-        <p:txBody>
-          <a:bodyPr wrap="square">
-            <a:spAutoFit/>
-          </a:bodyPr>
-          <a:lstStyle/>
-          <a:p>
-            <a:pPr algn="ctr"/>
-            <a:r>
-              <a:rPr sz="2200" b="0" i="1">
-                <a:solidFill>
-                  <a:srgbClr val="8C8C8C"/>
-                </a:solidFill>
-                <a:latin typeface="Arial"/>
-              </a:rPr>
-              <a:t/>
-            </a:r>
-          </a:p>
-        </p:txBody>
-      </p:sp>
-      <p:sp>
-        <p:nvSpPr>
-          <p:cNvPr id="4" name="TextBox 3"/>
-          <p:cNvSpPr txBox="1"/>
-          <p:nvPr/>
-        </p:nvSpPr>
-        <p:spPr>
-          <a:xfrm>
-            <a:off x="594360" y="3529584"/>
-            <a:ext cx="11002975" cy="685800"/>
-          </a:xfrm>
-          <a:prstGeom prst="rect">
-            <a:avLst/>
-          </a:prstGeom>
-          <a:noFill/>
-        </p:spPr>
-        <p:txBody>
-          <a:bodyPr wrap="square">
-            <a:spAutoFit/>
-          </a:bodyPr>
-          <a:lstStyle/>
-          <a:p>
-            <a:pPr algn="ctr"/>
-            <a:r>
-              <a:rPr sz="4400" b="1" i="0">
+            <a:off x="640080" y="2985516"/>
+            <a:ext cx="10911535" cy="731520"/>
+          </a:xfrm>
+          <a:prstGeom prst="rect">
+            <a:avLst/>
+          </a:prstGeom>
+          <a:noFill/>
+        </p:spPr>
+        <p:txBody>
+          <a:bodyPr wrap="square">
+            <a:spAutoFit/>
+          </a:bodyPr>
+          <a:lstStyle/>
+          <a:p>
+            <a:pPr algn="ctr"/>
+            <a:r>
+              <a:rPr sz="4800" b="1" i="0">
                 <a:solidFill>
                   <a:srgbClr val="FFFFFF"/>
                 </a:solidFill>
                 <a:latin typeface="Arial"/>
               </a:rPr>
               <a:t>Grande é Tua fidelidade</a:t>
-            </a:r>
-          </a:p>
-        </p:txBody>
-      </p:sp>
-      <p:sp>
-        <p:nvSpPr>
-          <p:cNvPr id="5" name="TextBox 4"/>
-          <p:cNvSpPr txBox="1"/>
-          <p:nvPr/>
-        </p:nvSpPr>
-        <p:spPr>
-          <a:xfrm>
-            <a:off x="594360" y="4251960"/>
-            <a:ext cx="11002975" cy="347472"/>
-          </a:xfrm>
-          <a:prstGeom prst="rect">
-            <a:avLst/>
-          </a:prstGeom>
-          <a:noFill/>
-        </p:spPr>
-        <p:txBody>
-          <a:bodyPr wrap="square">
-            <a:spAutoFit/>
-          </a:bodyPr>
-          <a:lstStyle/>
-          <a:p>
-            <a:pPr algn="ctr"/>
-            <a:r>
-              <a:rPr sz="2200" b="0" i="1">
-                <a:solidFill>
-                  <a:srgbClr val="8C8C8C"/>
-                </a:solidFill>
-                <a:latin typeface="Arial"/>
-              </a:rPr>
-              <a:t/>
             </a:r>
           </a:p>
         </p:txBody>
@@ -3528,204 +3465,29 @@
         </p:nvSpPr>
         <p:spPr>
           <a:xfrm>
-            <a:off x="594360" y="1837944"/>
-            <a:ext cx="11002975" cy="685800"/>
-          </a:xfrm>
-          <a:prstGeom prst="rect">
-            <a:avLst/>
-          </a:prstGeom>
-          <a:noFill/>
-        </p:spPr>
-        <p:txBody>
-          <a:bodyPr wrap="square">
-            <a:spAutoFit/>
-          </a:bodyPr>
-          <a:lstStyle/>
-          <a:p>
-            <a:pPr algn="ctr"/>
-            <a:r>
-              <a:rPr sz="4400" b="1" i="0">
+            <a:off x="640080" y="2702052"/>
+            <a:ext cx="10911535" cy="731520"/>
+          </a:xfrm>
+          <a:prstGeom prst="rect">
+            <a:avLst/>
+          </a:prstGeom>
+          <a:noFill/>
+        </p:spPr>
+        <p:txBody>
+          <a:bodyPr wrap="square">
+            <a:spAutoFit/>
+          </a:bodyPr>
+          <a:lstStyle/>
+          <a:p>
+            <a:pPr algn="ctr"/>
+            <a:r>
+              <a:rPr sz="3600" b="1" i="0">
                 <a:solidFill>
                   <a:srgbClr val="FFFFFF"/>
                 </a:solidFill>
                 <a:latin typeface="Arial"/>
               </a:rPr>
-              <a:t>罪を赦し平安を</a:t>
-            </a:r>
-          </a:p>
-        </p:txBody>
-      </p:sp>
-      <p:sp>
-        <p:nvSpPr>
-          <p:cNvPr id="3" name="TextBox 2"/>
-          <p:cNvSpPr txBox="1"/>
-          <p:nvPr/>
-        </p:nvSpPr>
-        <p:spPr>
-          <a:xfrm>
-            <a:off x="594360" y="2560320"/>
-            <a:ext cx="11002975" cy="384048"/>
-          </a:xfrm>
-          <a:prstGeom prst="rect">
-            <a:avLst/>
-          </a:prstGeom>
-          <a:noFill/>
-        </p:spPr>
-        <p:txBody>
-          <a:bodyPr wrap="square">
-            <a:spAutoFit/>
-          </a:bodyPr>
-          <a:lstStyle/>
-          <a:p>
-            <a:pPr algn="ctr"/>
-            <a:r>
-              <a:rPr sz="2400" b="0" i="1">
-                <a:solidFill>
-                  <a:srgbClr val="B4B4B4"/>
-                </a:solidFill>
-                <a:latin typeface="Arial"/>
-              </a:rPr>
-              <a:t>tsumi wo yurushi he-i-a-n wo</a:t>
-            </a:r>
-          </a:p>
-        </p:txBody>
-      </p:sp>
-      <p:sp>
-        <p:nvSpPr>
-          <p:cNvPr id="4" name="TextBox 3"/>
-          <p:cNvSpPr txBox="1"/>
-          <p:nvPr/>
-        </p:nvSpPr>
-        <p:spPr>
-          <a:xfrm>
-            <a:off x="594360" y="2980944"/>
-            <a:ext cx="11002975" cy="347472"/>
-          </a:xfrm>
-          <a:prstGeom prst="rect">
-            <a:avLst/>
-          </a:prstGeom>
-          <a:noFill/>
-        </p:spPr>
-        <p:txBody>
-          <a:bodyPr wrap="square">
-            <a:spAutoFit/>
-          </a:bodyPr>
-          <a:lstStyle/>
-          <a:p>
-            <a:pPr algn="ctr"/>
-            <a:r>
-              <a:rPr sz="2000" b="0" i="1">
-                <a:solidFill>
-                  <a:srgbClr val="8C8C8C"/>
-                </a:solidFill>
-                <a:latin typeface="Arial"/>
-              </a:rPr>
-              <a:t/>
-            </a:r>
-          </a:p>
-        </p:txBody>
-      </p:sp>
-      <p:sp>
-        <p:nvSpPr>
-          <p:cNvPr id="5" name="TextBox 4"/>
-          <p:cNvSpPr txBox="1"/>
-          <p:nvPr/>
-        </p:nvSpPr>
-        <p:spPr>
-          <a:xfrm>
-            <a:off x="594360" y="3529584"/>
-            <a:ext cx="11002975" cy="685800"/>
-          </a:xfrm>
-          <a:prstGeom prst="rect">
-            <a:avLst/>
-          </a:prstGeom>
-          <a:noFill/>
-        </p:spPr>
-        <p:txBody>
-          <a:bodyPr wrap="square">
-            <a:spAutoFit/>
-          </a:bodyPr>
-          <a:lstStyle/>
-          <a:p>
-            <a:pPr algn="ctr"/>
-            <a:r>
-              <a:rPr sz="4400" b="1" i="0">
-                <a:solidFill>
-                  <a:srgbClr val="FFFFFF"/>
-                </a:solidFill>
-                <a:latin typeface="Arial"/>
-              </a:rPr>
-              <a:t>主は与えて励まし</a:t>
-            </a:r>
-          </a:p>
-        </p:txBody>
-      </p:sp>
-      <p:sp>
-        <p:nvSpPr>
-          <p:cNvPr id="6" name="TextBox 5"/>
-          <p:cNvSpPr txBox="1"/>
-          <p:nvPr/>
-        </p:nvSpPr>
-        <p:spPr>
-          <a:xfrm>
-            <a:off x="594360" y="4251960"/>
-            <a:ext cx="11002975" cy="384048"/>
-          </a:xfrm>
-          <a:prstGeom prst="rect">
-            <a:avLst/>
-          </a:prstGeom>
-          <a:noFill/>
-        </p:spPr>
-        <p:txBody>
-          <a:bodyPr wrap="square">
-            <a:spAutoFit/>
-          </a:bodyPr>
-          <a:lstStyle/>
-          <a:p>
-            <a:pPr algn="ctr"/>
-            <a:r>
-              <a:rPr sz="2400" b="0" i="1">
-                <a:solidFill>
-                  <a:srgbClr val="B4B4B4"/>
-                </a:solidFill>
-                <a:latin typeface="Arial"/>
-              </a:rPr>
-              <a:t>shu wa ataete hagemashi</a:t>
-            </a:r>
-          </a:p>
-        </p:txBody>
-      </p:sp>
-      <p:sp>
-        <p:nvSpPr>
-          <p:cNvPr id="7" name="TextBox 6"/>
-          <p:cNvSpPr txBox="1"/>
-          <p:nvPr/>
-        </p:nvSpPr>
-        <p:spPr>
-          <a:xfrm>
-            <a:off x="594360" y="4672584"/>
-            <a:ext cx="11002975" cy="347472"/>
-          </a:xfrm>
-          <a:prstGeom prst="rect">
-            <a:avLst/>
-          </a:prstGeom>
-          <a:noFill/>
-        </p:spPr>
-        <p:txBody>
-          <a:bodyPr wrap="square">
-            <a:spAutoFit/>
-          </a:bodyPr>
-          <a:lstStyle/>
-          <a:p>
-            <a:pPr algn="ctr"/>
-            <a:r>
-              <a:rPr sz="2000" b="0" i="1">
-                <a:solidFill>
-                  <a:srgbClr val="8C8C8C"/>
-                </a:solidFill>
-                <a:latin typeface="Arial"/>
-              </a:rPr>
-              <a:t/>
+              <a:t>Perdão para o pecado e uma paz que perdura</a:t>
             </a:r>
           </a:p>
         </p:txBody>
@@ -3764,29 +3526,29 @@
         </p:nvSpPr>
         <p:spPr>
           <a:xfrm>
-            <a:off x="594360" y="1837944"/>
-            <a:ext cx="11002975" cy="685800"/>
-          </a:xfrm>
-          <a:prstGeom prst="rect">
-            <a:avLst/>
-          </a:prstGeom>
-          <a:noFill/>
-        </p:spPr>
-        <p:txBody>
-          <a:bodyPr wrap="square">
-            <a:spAutoFit/>
-          </a:bodyPr>
-          <a:lstStyle/>
-          <a:p>
-            <a:pPr algn="ctr"/>
-            <a:r>
-              <a:rPr sz="4400" b="1" i="0">
+            <a:off x="640080" y="1650492"/>
+            <a:ext cx="10911535" cy="731520"/>
+          </a:xfrm>
+          <a:prstGeom prst="rect">
+            <a:avLst/>
+          </a:prstGeom>
+          <a:noFill/>
+        </p:spPr>
+        <p:txBody>
+          <a:bodyPr wrap="square">
+            <a:spAutoFit/>
+          </a:bodyPr>
+          <a:lstStyle/>
+          <a:p>
+            <a:pPr algn="ctr"/>
+            <a:r>
+              <a:rPr sz="4800" b="1" i="0">
                 <a:solidFill>
                   <a:srgbClr val="FFFFFF"/>
                 </a:solidFill>
                 <a:latin typeface="Arial"/>
               </a:rPr>
-              <a:t>力に満ち祝福に</a:t>
+              <a:t>罪を赦し平安を</a:t>
             </a:r>
           </a:p>
         </p:txBody>
@@ -3799,8 +3561,8 @@
         </p:nvSpPr>
         <p:spPr>
           <a:xfrm>
-            <a:off x="594360" y="2560320"/>
-            <a:ext cx="11002975" cy="384048"/>
+            <a:off x="640080" y="2418588"/>
+            <a:ext cx="10911535" cy="365760"/>
           </a:xfrm>
           <a:prstGeom prst="rect">
             <a:avLst/>
@@ -3817,11 +3579,11 @@
             <a:r>
               <a:rPr sz="2400" b="0" i="1">
                 <a:solidFill>
-                  <a:srgbClr val="B4B4B4"/>
-                </a:solidFill>
-                <a:latin typeface="Arial"/>
-              </a:rPr>
-              <a:t>chikara ni michi shukufuku ni</a:t>
+                  <a:srgbClr val="AAAAAA"/>
+                </a:solidFill>
+                <a:latin typeface="Arial"/>
+              </a:rPr>
+              <a:t>tsumi wo yurushi he-i-a-n wo</a:t>
             </a:r>
           </a:p>
         </p:txBody>
@@ -3834,8 +3596,78 @@
         </p:nvSpPr>
         <p:spPr>
           <a:xfrm>
-            <a:off x="594360" y="2980944"/>
-            <a:ext cx="11002975" cy="347472"/>
+            <a:off x="640080" y="2985516"/>
+            <a:ext cx="10911535" cy="731520"/>
+          </a:xfrm>
+          <a:prstGeom prst="rect">
+            <a:avLst/>
+          </a:prstGeom>
+          <a:noFill/>
+        </p:spPr>
+        <p:txBody>
+          <a:bodyPr wrap="square">
+            <a:spAutoFit/>
+          </a:bodyPr>
+          <a:lstStyle/>
+          <a:p>
+            <a:pPr algn="ctr"/>
+            <a:r>
+              <a:rPr sz="4800" b="1" i="0">
+                <a:solidFill>
+                  <a:srgbClr val="FFFFFF"/>
+                </a:solidFill>
+                <a:latin typeface="Arial"/>
+              </a:rPr>
+              <a:t>主は与えて励まし</a:t>
+            </a:r>
+          </a:p>
+        </p:txBody>
+      </p:sp>
+      <p:sp>
+        <p:nvSpPr>
+          <p:cNvPr id="5" name="TextBox 4"/>
+          <p:cNvSpPr txBox="1"/>
+          <p:nvPr/>
+        </p:nvSpPr>
+        <p:spPr>
+          <a:xfrm>
+            <a:off x="640080" y="3753612"/>
+            <a:ext cx="10911535" cy="365760"/>
+          </a:xfrm>
+          <a:prstGeom prst="rect">
+            <a:avLst/>
+          </a:prstGeom>
+          <a:noFill/>
+        </p:spPr>
+        <p:txBody>
+          <a:bodyPr wrap="square">
+            <a:spAutoFit/>
+          </a:bodyPr>
+          <a:lstStyle/>
+          <a:p>
+            <a:pPr algn="ctr"/>
+            <a:r>
+              <a:rPr sz="2400" b="0" i="1">
+                <a:solidFill>
+                  <a:srgbClr val="AAAAAA"/>
+                </a:solidFill>
+                <a:latin typeface="Arial"/>
+              </a:rPr>
+              <a:t>shu wa ataete hagemashi</a:t>
+            </a:r>
+          </a:p>
+        </p:txBody>
+      </p:sp>
+      <p:sp>
+        <p:nvSpPr>
+          <p:cNvPr id="6" name="TextBox 5"/>
+          <p:cNvSpPr txBox="1"/>
+          <p:nvPr/>
+        </p:nvSpPr>
+        <p:spPr>
+          <a:xfrm>
+            <a:off x="640080" y="4530852"/>
+            <a:ext cx="10911535" cy="310896"/>
           </a:xfrm>
           <a:prstGeom prst="rect">
             <a:avLst/>
@@ -3852,81 +3684,11 @@
             <a:r>
               <a:rPr sz="2000" b="0" i="1">
                 <a:solidFill>
-                  <a:srgbClr val="8C8C8C"/>
-                </a:solidFill>
-                <a:latin typeface="Arial"/>
-              </a:rPr>
-              <a:t/>
-            </a:r>
-          </a:p>
-        </p:txBody>
-      </p:sp>
-      <p:sp>
-        <p:nvSpPr>
-          <p:cNvPr id="5" name="TextBox 4"/>
-          <p:cNvSpPr txBox="1"/>
-          <p:nvPr/>
-        </p:nvSpPr>
-        <p:spPr>
-          <a:xfrm>
-            <a:off x="594360" y="3529584"/>
-            <a:ext cx="11002975" cy="685800"/>
-          </a:xfrm>
-          <a:prstGeom prst="rect">
-            <a:avLst/>
-          </a:prstGeom>
-          <a:noFill/>
-        </p:spPr>
-        <p:txBody>
-          <a:bodyPr wrap="square">
-            <a:spAutoFit/>
-          </a:bodyPr>
-          <a:lstStyle/>
-          <a:p>
-            <a:pPr algn="ctr"/>
-            <a:r>
-              <a:rPr sz="4400" b="1" i="0">
-                <a:solidFill>
-                  <a:srgbClr val="FFFFFF"/>
-                </a:solidFill>
-                <a:latin typeface="Arial"/>
-              </a:rPr>
-              <a:t>溢れさせて下さる</a:t>
-            </a:r>
-          </a:p>
-        </p:txBody>
-      </p:sp>
-      <p:sp>
-        <p:nvSpPr>
-          <p:cNvPr id="6" name="TextBox 5"/>
-          <p:cNvSpPr txBox="1"/>
-          <p:nvPr/>
-        </p:nvSpPr>
-        <p:spPr>
-          <a:xfrm>
-            <a:off x="594360" y="4251960"/>
-            <a:ext cx="11002975" cy="384048"/>
-          </a:xfrm>
-          <a:prstGeom prst="rect">
-            <a:avLst/>
-          </a:prstGeom>
-          <a:noFill/>
-        </p:spPr>
-        <p:txBody>
-          <a:bodyPr wrap="square">
-            <a:spAutoFit/>
-          </a:bodyPr>
-          <a:lstStyle/>
-          <a:p>
-            <a:pPr algn="ctr"/>
-            <a:r>
-              <a:rPr sz="2400" b="0" i="1">
-                <a:solidFill>
-                  <a:srgbClr val="B4B4B4"/>
-                </a:solidFill>
-                <a:latin typeface="Arial"/>
-              </a:rPr>
-              <a:t>afuresasete kudasaru</a:t>
+                  <a:srgbClr val="828282"/>
+                </a:solidFill>
+                <a:latin typeface="Arial"/>
+              </a:rPr>
+              <a:t>Grande é Tua fidelidade</a:t>
             </a:r>
           </a:p>
         </p:txBody>
@@ -3939,8 +3701,8 @@
         </p:nvSpPr>
         <p:spPr>
           <a:xfrm>
-            <a:off x="594360" y="4672584"/>
-            <a:ext cx="11002975" cy="347472"/>
+            <a:off x="640080" y="4896612"/>
+            <a:ext cx="10911535" cy="310896"/>
           </a:xfrm>
           <a:prstGeom prst="rect">
             <a:avLst/>
@@ -3957,11 +3719,11 @@
             <a:r>
               <a:rPr sz="2000" b="0" i="1">
                 <a:solidFill>
-                  <a:srgbClr val="8C8C8C"/>
-                </a:solidFill>
-                <a:latin typeface="Arial"/>
-              </a:rPr>
-              <a:t/>
+                  <a:srgbClr val="828282"/>
+                </a:solidFill>
+                <a:latin typeface="Arial"/>
+              </a:rPr>
+              <a:t>O verão, o inverno, o outono e a primavera</a:t>
             </a:r>
           </a:p>
         </p:txBody>
@@ -4000,29 +3762,29 @@
         </p:nvSpPr>
         <p:spPr>
           <a:xfrm>
-            <a:off x="594360" y="1837944"/>
-            <a:ext cx="11002975" cy="685800"/>
-          </a:xfrm>
-          <a:prstGeom prst="rect">
-            <a:avLst/>
-          </a:prstGeom>
-          <a:noFill/>
-        </p:spPr>
-        <p:txBody>
-          <a:bodyPr wrap="square">
-            <a:spAutoFit/>
-          </a:bodyPr>
-          <a:lstStyle/>
-          <a:p>
-            <a:pPr algn="ctr"/>
-            <a:r>
-              <a:rPr sz="4400" b="1" i="0">
+            <a:off x="640080" y="1650492"/>
+            <a:ext cx="10911535" cy="731520"/>
+          </a:xfrm>
+          <a:prstGeom prst="rect">
+            <a:avLst/>
+          </a:prstGeom>
+          <a:noFill/>
+        </p:spPr>
+        <p:txBody>
+          <a:bodyPr wrap="square">
+            <a:spAutoFit/>
+          </a:bodyPr>
+          <a:lstStyle/>
+          <a:p>
+            <a:pPr algn="ctr"/>
+            <a:r>
+              <a:rPr sz="4800" b="1" i="0">
                 <a:solidFill>
                   <a:srgbClr val="FFFFFF"/>
                 </a:solidFill>
                 <a:latin typeface="Arial"/>
               </a:rPr>
-              <a:t>すばらしい主　その真実は</a:t>
+              <a:t>力に満ち祝福に</a:t>
             </a:r>
           </a:p>
         </p:txBody>
@@ -4035,8 +3797,8 @@
         </p:nvSpPr>
         <p:spPr>
           <a:xfrm>
-            <a:off x="594360" y="2560320"/>
-            <a:ext cx="11002975" cy="384048"/>
+            <a:off x="640080" y="2418588"/>
+            <a:ext cx="10911535" cy="365760"/>
           </a:xfrm>
           <a:prstGeom prst="rect">
             <a:avLst/>
@@ -4053,11 +3815,11 @@
             <a:r>
               <a:rPr sz="2400" b="0" i="1">
                 <a:solidFill>
-                  <a:srgbClr val="B4B4B4"/>
-                </a:solidFill>
-                <a:latin typeface="Arial"/>
-              </a:rPr>
-              <a:t>subarashii Shu  sono shinjitsu wa</a:t>
+                  <a:srgbClr val="AAAAAA"/>
+                </a:solidFill>
+                <a:latin typeface="Arial"/>
+              </a:rPr>
+              <a:t>chikara ni michi shukufuku ni</a:t>
             </a:r>
           </a:p>
         </p:txBody>
@@ -4070,8 +3832,78 @@
         </p:nvSpPr>
         <p:spPr>
           <a:xfrm>
-            <a:off x="594360" y="2980944"/>
-            <a:ext cx="11002975" cy="347472"/>
+            <a:off x="640080" y="2985516"/>
+            <a:ext cx="10911535" cy="731520"/>
+          </a:xfrm>
+          <a:prstGeom prst="rect">
+            <a:avLst/>
+          </a:prstGeom>
+          <a:noFill/>
+        </p:spPr>
+        <p:txBody>
+          <a:bodyPr wrap="square">
+            <a:spAutoFit/>
+          </a:bodyPr>
+          <a:lstStyle/>
+          <a:p>
+            <a:pPr algn="ctr"/>
+            <a:r>
+              <a:rPr sz="4800" b="1" i="0">
+                <a:solidFill>
+                  <a:srgbClr val="FFFFFF"/>
+                </a:solidFill>
+                <a:latin typeface="Arial"/>
+              </a:rPr>
+              <a:t>溢れさせて下さる</a:t>
+            </a:r>
+          </a:p>
+        </p:txBody>
+      </p:sp>
+      <p:sp>
+        <p:nvSpPr>
+          <p:cNvPr id="5" name="TextBox 4"/>
+          <p:cNvSpPr txBox="1"/>
+          <p:nvPr/>
+        </p:nvSpPr>
+        <p:spPr>
+          <a:xfrm>
+            <a:off x="640080" y="3753612"/>
+            <a:ext cx="10911535" cy="365760"/>
+          </a:xfrm>
+          <a:prstGeom prst="rect">
+            <a:avLst/>
+          </a:prstGeom>
+          <a:noFill/>
+        </p:spPr>
+        <p:txBody>
+          <a:bodyPr wrap="square">
+            <a:spAutoFit/>
+          </a:bodyPr>
+          <a:lstStyle/>
+          <a:p>
+            <a:pPr algn="ctr"/>
+            <a:r>
+              <a:rPr sz="2400" b="0" i="1">
+                <a:solidFill>
+                  <a:srgbClr val="AAAAAA"/>
+                </a:solidFill>
+                <a:latin typeface="Arial"/>
+              </a:rPr>
+              <a:t>afuresasete kudasaru</a:t>
+            </a:r>
+          </a:p>
+        </p:txBody>
+      </p:sp>
+      <p:sp>
+        <p:nvSpPr>
+          <p:cNvPr id="6" name="TextBox 5"/>
+          <p:cNvSpPr txBox="1"/>
+          <p:nvPr/>
+        </p:nvSpPr>
+        <p:spPr>
+          <a:xfrm>
+            <a:off x="640080" y="4530852"/>
+            <a:ext cx="10911535" cy="310896"/>
           </a:xfrm>
           <a:prstGeom prst="rect">
             <a:avLst/>
@@ -4088,81 +3920,11 @@
             <a:r>
               <a:rPr sz="2000" b="0" i="1">
                 <a:solidFill>
-                  <a:srgbClr val="8C8C8C"/>
-                </a:solidFill>
-                <a:latin typeface="Arial"/>
-              </a:rPr>
-              <a:t>Perdão para o pecado e uma paz que perdura</a:t>
-            </a:r>
-          </a:p>
-        </p:txBody>
-      </p:sp>
-      <p:sp>
-        <p:nvSpPr>
-          <p:cNvPr id="5" name="TextBox 4"/>
-          <p:cNvSpPr txBox="1"/>
-          <p:nvPr/>
-        </p:nvSpPr>
-        <p:spPr>
-          <a:xfrm>
-            <a:off x="594360" y="3529584"/>
-            <a:ext cx="11002975" cy="685800"/>
-          </a:xfrm>
-          <a:prstGeom prst="rect">
-            <a:avLst/>
-          </a:prstGeom>
-          <a:noFill/>
-        </p:spPr>
-        <p:txBody>
-          <a:bodyPr wrap="square">
-            <a:spAutoFit/>
-          </a:bodyPr>
-          <a:lstStyle/>
-          <a:p>
-            <a:pPr algn="ctr"/>
-            <a:r>
-              <a:rPr sz="4400" b="1" i="0">
-                <a:solidFill>
-                  <a:srgbClr val="FFFFFF"/>
-                </a:solidFill>
-                <a:latin typeface="Arial"/>
-              </a:rPr>
-              <a:t>朝毎にあたらしく</a:t>
-            </a:r>
-          </a:p>
-        </p:txBody>
-      </p:sp>
-      <p:sp>
-        <p:nvSpPr>
-          <p:cNvPr id="6" name="TextBox 5"/>
-          <p:cNvSpPr txBox="1"/>
-          <p:nvPr/>
-        </p:nvSpPr>
-        <p:spPr>
-          <a:xfrm>
-            <a:off x="594360" y="4251960"/>
-            <a:ext cx="11002975" cy="384048"/>
-          </a:xfrm>
-          <a:prstGeom prst="rect">
-            <a:avLst/>
-          </a:prstGeom>
-          <a:noFill/>
-        </p:spPr>
-        <p:txBody>
-          <a:bodyPr wrap="square">
-            <a:spAutoFit/>
-          </a:bodyPr>
-          <a:lstStyle/>
-          <a:p>
-            <a:pPr algn="ctr"/>
-            <a:r>
-              <a:rPr sz="2400" b="0" i="1">
-                <a:solidFill>
-                  <a:srgbClr val="B4B4B4"/>
-                </a:solidFill>
-                <a:latin typeface="Arial"/>
-              </a:rPr>
-              <a:t>asagotoni atarashiku</a:t>
+                  <a:srgbClr val="828282"/>
+                </a:solidFill>
+                <a:latin typeface="Arial"/>
+              </a:rPr>
+              <a:t>Sol, lua e estrelas em seus cursos acima</a:t>
             </a:r>
           </a:p>
         </p:txBody>
@@ -4175,8 +3937,8 @@
         </p:nvSpPr>
         <p:spPr>
           <a:xfrm>
-            <a:off x="594360" y="4672584"/>
-            <a:ext cx="11002975" cy="347472"/>
+            <a:off x="640080" y="4896612"/>
+            <a:ext cx="10911535" cy="310896"/>
           </a:xfrm>
           <a:prstGeom prst="rect">
             <a:avLst/>
@@ -4193,11 +3955,11 @@
             <a:r>
               <a:rPr sz="2000" b="0" i="1">
                 <a:solidFill>
-                  <a:srgbClr val="8C8C8C"/>
-                </a:solidFill>
-                <a:latin typeface="Arial"/>
-              </a:rPr>
-              <a:t/>
+                  <a:srgbClr val="828282"/>
+                </a:solidFill>
+                <a:latin typeface="Arial"/>
+              </a:rPr>
+              <a:t>Juntam-se a toda a natureza em testemunho mudo</a:t>
             </a:r>
           </a:p>
         </p:txBody>
@@ -4236,29 +3998,29 @@
         </p:nvSpPr>
         <p:spPr>
           <a:xfrm>
-            <a:off x="594360" y="1837944"/>
-            <a:ext cx="11002975" cy="685800"/>
-          </a:xfrm>
-          <a:prstGeom prst="rect">
-            <a:avLst/>
-          </a:prstGeom>
-          <a:noFill/>
-        </p:spPr>
-        <p:txBody>
-          <a:bodyPr wrap="square">
-            <a:spAutoFit/>
-          </a:bodyPr>
-          <a:lstStyle/>
-          <a:p>
-            <a:pPr algn="ctr"/>
-            <a:r>
-              <a:rPr sz="4400" b="1" i="0">
+            <a:off x="640080" y="1650492"/>
+            <a:ext cx="10911535" cy="731520"/>
+          </a:xfrm>
+          <a:prstGeom prst="rect">
+            <a:avLst/>
+          </a:prstGeom>
+          <a:noFill/>
+        </p:spPr>
+        <p:txBody>
+          <a:bodyPr wrap="square">
+            <a:spAutoFit/>
+          </a:bodyPr>
+          <a:lstStyle/>
+          <a:p>
+            <a:pPr algn="ctr"/>
+            <a:r>
+              <a:rPr sz="4800" b="1" i="0">
                 <a:solidFill>
                   <a:srgbClr val="FFFFFF"/>
                 </a:solidFill>
                 <a:latin typeface="Arial"/>
               </a:rPr>
-              <a:t>深い恵み知らされて</a:t>
+              <a:t>すばらしい主　その真実は</a:t>
             </a:r>
           </a:p>
         </p:txBody>
@@ -4271,8 +4033,8 @@
         </p:nvSpPr>
         <p:spPr>
           <a:xfrm>
-            <a:off x="594360" y="2560320"/>
-            <a:ext cx="11002975" cy="384048"/>
+            <a:off x="640080" y="2418588"/>
+            <a:ext cx="10911535" cy="365760"/>
           </a:xfrm>
           <a:prstGeom prst="rect">
             <a:avLst/>
@@ -4289,11 +4051,11 @@
             <a:r>
               <a:rPr sz="2400" b="0" i="1">
                 <a:solidFill>
-                  <a:srgbClr val="B4B4B4"/>
-                </a:solidFill>
-                <a:latin typeface="Arial"/>
-              </a:rPr>
-              <a:t>Fukai megumi shirasarete</a:t>
+                  <a:srgbClr val="AAAAAA"/>
+                </a:solidFill>
+                <a:latin typeface="Arial"/>
+              </a:rPr>
+              <a:t>subarashii Shu  sono shinjitsu wa</a:t>
             </a:r>
           </a:p>
         </p:txBody>
@@ -4306,8 +4068,78 @@
         </p:nvSpPr>
         <p:spPr>
           <a:xfrm>
-            <a:off x="594360" y="2980944"/>
-            <a:ext cx="11002975" cy="347472"/>
+            <a:off x="640080" y="2985516"/>
+            <a:ext cx="10911535" cy="731520"/>
+          </a:xfrm>
+          <a:prstGeom prst="rect">
+            <a:avLst/>
+          </a:prstGeom>
+          <a:noFill/>
+        </p:spPr>
+        <p:txBody>
+          <a:bodyPr wrap="square">
+            <a:spAutoFit/>
+          </a:bodyPr>
+          <a:lstStyle/>
+          <a:p>
+            <a:pPr algn="ctr"/>
+            <a:r>
+              <a:rPr sz="4800" b="1" i="0">
+                <a:solidFill>
+                  <a:srgbClr val="FFFFFF"/>
+                </a:solidFill>
+                <a:latin typeface="Arial"/>
+              </a:rPr>
+              <a:t>朝毎にあたらしく</a:t>
+            </a:r>
+          </a:p>
+        </p:txBody>
+      </p:sp>
+      <p:sp>
+        <p:nvSpPr>
+          <p:cNvPr id="5" name="TextBox 4"/>
+          <p:cNvSpPr txBox="1"/>
+          <p:nvPr/>
+        </p:nvSpPr>
+        <p:spPr>
+          <a:xfrm>
+            <a:off x="640080" y="3753612"/>
+            <a:ext cx="10911535" cy="365760"/>
+          </a:xfrm>
+          <a:prstGeom prst="rect">
+            <a:avLst/>
+          </a:prstGeom>
+          <a:noFill/>
+        </p:spPr>
+        <p:txBody>
+          <a:bodyPr wrap="square">
+            <a:spAutoFit/>
+          </a:bodyPr>
+          <a:lstStyle/>
+          <a:p>
+            <a:pPr algn="ctr"/>
+            <a:r>
+              <a:rPr sz="2400" b="0" i="1">
+                <a:solidFill>
+                  <a:srgbClr val="AAAAAA"/>
+                </a:solidFill>
+                <a:latin typeface="Arial"/>
+              </a:rPr>
+              <a:t>asagotoni atarashiku</a:t>
+            </a:r>
+          </a:p>
+        </p:txBody>
+      </p:sp>
+      <p:sp>
+        <p:nvSpPr>
+          <p:cNvPr id="6" name="TextBox 5"/>
+          <p:cNvSpPr txBox="1"/>
+          <p:nvPr/>
+        </p:nvSpPr>
+        <p:spPr>
+          <a:xfrm>
+            <a:off x="640080" y="4530852"/>
+            <a:ext cx="10911535" cy="310896"/>
           </a:xfrm>
           <a:prstGeom prst="rect">
             <a:avLst/>
@@ -4324,81 +4156,11 @@
             <a:r>
               <a:rPr sz="2000" b="0" i="1">
                 <a:solidFill>
-                  <a:srgbClr val="8C8C8C"/>
-                </a:solidFill>
-                <a:latin typeface="Arial"/>
-              </a:rPr>
-              <a:t/>
-            </a:r>
-          </a:p>
-        </p:txBody>
-      </p:sp>
-      <p:sp>
-        <p:nvSpPr>
-          <p:cNvPr id="5" name="TextBox 4"/>
-          <p:cNvSpPr txBox="1"/>
-          <p:nvPr/>
-        </p:nvSpPr>
-        <p:spPr>
-          <a:xfrm>
-            <a:off x="594360" y="3529584"/>
-            <a:ext cx="11002975" cy="685800"/>
-          </a:xfrm>
-          <a:prstGeom prst="rect">
-            <a:avLst/>
-          </a:prstGeom>
-          <a:noFill/>
-        </p:spPr>
-        <p:txBody>
-          <a:bodyPr wrap="square">
-            <a:spAutoFit/>
-          </a:bodyPr>
-          <a:lstStyle/>
-          <a:p>
-            <a:pPr algn="ctr"/>
-            <a:r>
-              <a:rPr sz="4400" b="1" i="0">
-                <a:solidFill>
-                  <a:srgbClr val="FFFFFF"/>
-                </a:solidFill>
-                <a:latin typeface="Arial"/>
-              </a:rPr>
-              <a:t>賛美します主の御名</a:t>
-            </a:r>
-          </a:p>
-        </p:txBody>
-      </p:sp>
-      <p:sp>
-        <p:nvSpPr>
-          <p:cNvPr id="6" name="TextBox 5"/>
-          <p:cNvSpPr txBox="1"/>
-          <p:nvPr/>
-        </p:nvSpPr>
-        <p:spPr>
-          <a:xfrm>
-            <a:off x="594360" y="4251960"/>
-            <a:ext cx="11002975" cy="384048"/>
-          </a:xfrm>
-          <a:prstGeom prst="rect">
-            <a:avLst/>
-          </a:prstGeom>
-          <a:noFill/>
-        </p:spPr>
-        <p:txBody>
-          <a:bodyPr wrap="square">
-            <a:spAutoFit/>
-          </a:bodyPr>
-          <a:lstStyle/>
-          <a:p>
-            <a:pPr algn="ctr"/>
-            <a:r>
-              <a:rPr sz="2400" b="0" i="1">
-                <a:solidFill>
-                  <a:srgbClr val="B4B4B4"/>
-                </a:solidFill>
-                <a:latin typeface="Arial"/>
-              </a:rPr>
-              <a:t>sanbishimasu shu no mi na</a:t>
+                  <a:srgbClr val="828282"/>
+                </a:solidFill>
+                <a:latin typeface="Arial"/>
+              </a:rPr>
+              <a:t>Grande é Tua fidelidade</a:t>
             </a:r>
           </a:p>
         </p:txBody>
@@ -4411,8 +4173,8 @@
         </p:nvSpPr>
         <p:spPr>
           <a:xfrm>
-            <a:off x="594360" y="4672584"/>
-            <a:ext cx="11002975" cy="347472"/>
+            <a:off x="640080" y="4896612"/>
+            <a:ext cx="10911535" cy="310896"/>
           </a:xfrm>
           <a:prstGeom prst="rect">
             <a:avLst/>
@@ -4429,11 +4191,11 @@
             <a:r>
               <a:rPr sz="2000" b="0" i="1">
                 <a:solidFill>
-                  <a:srgbClr val="8C8C8C"/>
-                </a:solidFill>
-                <a:latin typeface="Arial"/>
-              </a:rPr>
-              <a:t/>
+                  <a:srgbClr val="828282"/>
+                </a:solidFill>
+                <a:latin typeface="Arial"/>
+              </a:rPr>
+              <a:t>Grande é Tua fidelidade</a:t>
             </a:r>
           </a:p>
         </p:txBody>
@@ -4472,29 +4234,29 @@
         </p:nvSpPr>
         <p:spPr>
           <a:xfrm>
-            <a:off x="594360" y="2258568"/>
-            <a:ext cx="11002975" cy="685800"/>
-          </a:xfrm>
-          <a:prstGeom prst="rect">
-            <a:avLst/>
-          </a:prstGeom>
-          <a:noFill/>
-        </p:spPr>
-        <p:txBody>
-          <a:bodyPr wrap="square">
-            <a:spAutoFit/>
-          </a:bodyPr>
-          <a:lstStyle/>
-          <a:p>
-            <a:pPr algn="ctr"/>
-            <a:r>
-              <a:rPr sz="4400" b="1" i="0">
+            <a:off x="640080" y="1650492"/>
+            <a:ext cx="10911535" cy="731520"/>
+          </a:xfrm>
+          <a:prstGeom prst="rect">
+            <a:avLst/>
+          </a:prstGeom>
+          <a:noFill/>
+        </p:spPr>
+        <p:txBody>
+          <a:bodyPr wrap="square">
+            <a:spAutoFit/>
+          </a:bodyPr>
+          <a:lstStyle/>
+          <a:p>
+            <a:pPr algn="ctr"/>
+            <a:r>
+              <a:rPr sz="4800" b="1" i="0">
                 <a:solidFill>
                   <a:srgbClr val="FFFFFF"/>
                 </a:solidFill>
                 <a:latin typeface="Arial"/>
               </a:rPr>
-              <a:t>Grande é Tua fidelidade</a:t>
+              <a:t>深い恵み知らされて</a:t>
             </a:r>
           </a:p>
         </p:txBody>
@@ -4507,29 +4269,29 @@
         </p:nvSpPr>
         <p:spPr>
           <a:xfrm>
-            <a:off x="594360" y="2980944"/>
-            <a:ext cx="11002975" cy="347472"/>
-          </a:xfrm>
-          <a:prstGeom prst="rect">
-            <a:avLst/>
-          </a:prstGeom>
-          <a:noFill/>
-        </p:spPr>
-        <p:txBody>
-          <a:bodyPr wrap="square">
-            <a:spAutoFit/>
-          </a:bodyPr>
-          <a:lstStyle/>
-          <a:p>
-            <a:pPr algn="ctr"/>
-            <a:r>
-              <a:rPr sz="2200" b="0" i="1">
-                <a:solidFill>
-                  <a:srgbClr val="8C8C8C"/>
-                </a:solidFill>
-                <a:latin typeface="Arial"/>
-              </a:rPr>
-              <a:t/>
+            <a:off x="640080" y="2418588"/>
+            <a:ext cx="10911535" cy="365760"/>
+          </a:xfrm>
+          <a:prstGeom prst="rect">
+            <a:avLst/>
+          </a:prstGeom>
+          <a:noFill/>
+        </p:spPr>
+        <p:txBody>
+          <a:bodyPr wrap="square">
+            <a:spAutoFit/>
+          </a:bodyPr>
+          <a:lstStyle/>
+          <a:p>
+            <a:pPr algn="ctr"/>
+            <a:r>
+              <a:rPr sz="2400" b="0" i="1">
+                <a:solidFill>
+                  <a:srgbClr val="AAAAAA"/>
+                </a:solidFill>
+                <a:latin typeface="Arial"/>
+              </a:rPr>
+              <a:t>Fukai megumi shirasarete</a:t>
             </a:r>
           </a:p>
         </p:txBody>
@@ -4542,29 +4304,29 @@
         </p:nvSpPr>
         <p:spPr>
           <a:xfrm>
-            <a:off x="594360" y="3529584"/>
-            <a:ext cx="11002975" cy="685800"/>
-          </a:xfrm>
-          <a:prstGeom prst="rect">
-            <a:avLst/>
-          </a:prstGeom>
-          <a:noFill/>
-        </p:spPr>
-        <p:txBody>
-          <a:bodyPr wrap="square">
-            <a:spAutoFit/>
-          </a:bodyPr>
-          <a:lstStyle/>
-          <a:p>
-            <a:pPr algn="ctr"/>
-            <a:r>
-              <a:rPr sz="3352" b="1" i="0">
+            <a:off x="640080" y="2985516"/>
+            <a:ext cx="10911535" cy="731520"/>
+          </a:xfrm>
+          <a:prstGeom prst="rect">
+            <a:avLst/>
+          </a:prstGeom>
+          <a:noFill/>
+        </p:spPr>
+        <p:txBody>
+          <a:bodyPr wrap="square">
+            <a:spAutoFit/>
+          </a:bodyPr>
+          <a:lstStyle/>
+          <a:p>
+            <a:pPr algn="ctr"/>
+            <a:r>
+              <a:rPr sz="4800" b="1" i="0">
                 <a:solidFill>
                   <a:srgbClr val="FFFFFF"/>
                 </a:solidFill>
                 <a:latin typeface="Arial"/>
               </a:rPr>
-              <a:t>O verão, o inverno, o outono e a primavera</a:t>
+              <a:t>賛美します主の御名</a:t>
             </a:r>
           </a:p>
         </p:txBody>
@@ -4577,29 +4339,99 @@
         </p:nvSpPr>
         <p:spPr>
           <a:xfrm>
-            <a:off x="594360" y="4251960"/>
-            <a:ext cx="11002975" cy="347472"/>
-          </a:xfrm>
-          <a:prstGeom prst="rect">
-            <a:avLst/>
-          </a:prstGeom>
-          <a:noFill/>
-        </p:spPr>
-        <p:txBody>
-          <a:bodyPr wrap="square">
-            <a:spAutoFit/>
-          </a:bodyPr>
-          <a:lstStyle/>
-          <a:p>
-            <a:pPr algn="ctr"/>
-            <a:r>
-              <a:rPr sz="2200" b="0" i="1">
-                <a:solidFill>
-                  <a:srgbClr val="8C8C8C"/>
-                </a:solidFill>
-                <a:latin typeface="Arial"/>
-              </a:rPr>
-              <a:t/>
+            <a:off x="640080" y="3753612"/>
+            <a:ext cx="10911535" cy="365760"/>
+          </a:xfrm>
+          <a:prstGeom prst="rect">
+            <a:avLst/>
+          </a:prstGeom>
+          <a:noFill/>
+        </p:spPr>
+        <p:txBody>
+          <a:bodyPr wrap="square">
+            <a:spAutoFit/>
+          </a:bodyPr>
+          <a:lstStyle/>
+          <a:p>
+            <a:pPr algn="ctr"/>
+            <a:r>
+              <a:rPr sz="2400" b="0" i="1">
+                <a:solidFill>
+                  <a:srgbClr val="AAAAAA"/>
+                </a:solidFill>
+                <a:latin typeface="Arial"/>
+              </a:rPr>
+              <a:t>sanbishimasu shu no mi na</a:t>
+            </a:r>
+          </a:p>
+        </p:txBody>
+      </p:sp>
+      <p:sp>
+        <p:nvSpPr>
+          <p:cNvPr id="6" name="TextBox 5"/>
+          <p:cNvSpPr txBox="1"/>
+          <p:nvPr/>
+        </p:nvSpPr>
+        <p:spPr>
+          <a:xfrm>
+            <a:off x="640080" y="4530852"/>
+            <a:ext cx="10911535" cy="310896"/>
+          </a:xfrm>
+          <a:prstGeom prst="rect">
+            <a:avLst/>
+          </a:prstGeom>
+          <a:noFill/>
+        </p:spPr>
+        <p:txBody>
+          <a:bodyPr wrap="square">
+            <a:spAutoFit/>
+          </a:bodyPr>
+          <a:lstStyle/>
+          <a:p>
+            <a:pPr algn="ctr"/>
+            <a:r>
+              <a:rPr sz="2000" b="0" i="1">
+                <a:solidFill>
+                  <a:srgbClr val="828282"/>
+                </a:solidFill>
+                <a:latin typeface="Arial"/>
+              </a:rPr>
+              <a:t>Manhã após manhã novas misericórdias encontro</a:t>
+            </a:r>
+          </a:p>
+        </p:txBody>
+      </p:sp>
+      <p:sp>
+        <p:nvSpPr>
+          <p:cNvPr id="7" name="TextBox 6"/>
+          <p:cNvSpPr txBox="1"/>
+          <p:nvPr/>
+        </p:nvSpPr>
+        <p:spPr>
+          <a:xfrm>
+            <a:off x="640080" y="4896612"/>
+            <a:ext cx="10911535" cy="310896"/>
+          </a:xfrm>
+          <a:prstGeom prst="rect">
+            <a:avLst/>
+          </a:prstGeom>
+          <a:noFill/>
+        </p:spPr>
+        <p:txBody>
+          <a:bodyPr wrap="square">
+            <a:spAutoFit/>
+          </a:bodyPr>
+          <a:lstStyle/>
+          <a:p>
+            <a:pPr algn="ctr"/>
+            <a:r>
+              <a:rPr sz="2000" b="0" i="1">
+                <a:solidFill>
+                  <a:srgbClr val="828282"/>
+                </a:solidFill>
+                <a:latin typeface="Arial"/>
+              </a:rPr>
+              <a:t>Tudo que preciso Tua mão sempre provê</a:t>
             </a:r>
           </a:p>
         </p:txBody>
@@ -4638,29 +4470,29 @@
         </p:nvSpPr>
         <p:spPr>
           <a:xfrm>
-            <a:off x="594360" y="2258568"/>
-            <a:ext cx="11002975" cy="685800"/>
-          </a:xfrm>
-          <a:prstGeom prst="rect">
-            <a:avLst/>
-          </a:prstGeom>
-          <a:noFill/>
-        </p:spPr>
-        <p:txBody>
-          <a:bodyPr wrap="square">
-            <a:spAutoFit/>
-          </a:bodyPr>
-          <a:lstStyle/>
-          <a:p>
-            <a:pPr algn="ctr"/>
-            <a:r>
-              <a:rPr sz="3520" b="1" i="0">
+            <a:off x="640080" y="2052828"/>
+            <a:ext cx="10911535" cy="731520"/>
+          </a:xfrm>
+          <a:prstGeom prst="rect">
+            <a:avLst/>
+          </a:prstGeom>
+          <a:noFill/>
+        </p:spPr>
+        <p:txBody>
+          <a:bodyPr wrap="square">
+            <a:spAutoFit/>
+          </a:bodyPr>
+          <a:lstStyle/>
+          <a:p>
+            <a:pPr algn="ctr"/>
+            <a:r>
+              <a:rPr sz="4800" b="1" i="0">
                 <a:solidFill>
                   <a:srgbClr val="FFFFFF"/>
                 </a:solidFill>
                 <a:latin typeface="Arial"/>
               </a:rPr>
-              <a:t>Sol, lua e estrelas em seus cursos acima</a:t>
+              <a:t>Grande é Tua fidelidade</a:t>
             </a:r>
           </a:p>
         </p:txBody>
@@ -4673,29 +4505,29 @@
         </p:nvSpPr>
         <p:spPr>
           <a:xfrm>
-            <a:off x="594360" y="2980944"/>
-            <a:ext cx="11002975" cy="347472"/>
-          </a:xfrm>
-          <a:prstGeom prst="rect">
-            <a:avLst/>
-          </a:prstGeom>
-          <a:noFill/>
-        </p:spPr>
-        <p:txBody>
-          <a:bodyPr wrap="square">
-            <a:spAutoFit/>
-          </a:bodyPr>
-          <a:lstStyle/>
-          <a:p>
-            <a:pPr algn="ctr"/>
-            <a:r>
-              <a:rPr sz="2200" b="0" i="1">
-                <a:solidFill>
-                  <a:srgbClr val="8C8C8C"/>
-                </a:solidFill>
-                <a:latin typeface="Arial"/>
-              </a:rPr>
-              <a:t/>
+            <a:off x="640080" y="2985516"/>
+            <a:ext cx="10911535" cy="731520"/>
+          </a:xfrm>
+          <a:prstGeom prst="rect">
+            <a:avLst/>
+          </a:prstGeom>
+          <a:noFill/>
+        </p:spPr>
+        <p:txBody>
+          <a:bodyPr wrap="square">
+            <a:spAutoFit/>
+          </a:bodyPr>
+          <a:lstStyle/>
+          <a:p>
+            <a:pPr algn="ctr"/>
+            <a:r>
+              <a:rPr sz="3600" b="1" i="0">
+                <a:solidFill>
+                  <a:srgbClr val="FFFFFF"/>
+                </a:solidFill>
+                <a:latin typeface="Arial"/>
+              </a:rPr>
+              <a:t>O verão, o inverno, o outono e a primavera</a:t>
             </a:r>
           </a:p>
         </p:txBody>
@@ -4708,29 +4540,29 @@
         </p:nvSpPr>
         <p:spPr>
           <a:xfrm>
-            <a:off x="594360" y="3529584"/>
-            <a:ext cx="11002975" cy="685800"/>
-          </a:xfrm>
-          <a:prstGeom prst="rect">
-            <a:avLst/>
-          </a:prstGeom>
-          <a:noFill/>
-        </p:spPr>
-        <p:txBody>
-          <a:bodyPr wrap="square">
-            <a:spAutoFit/>
-          </a:bodyPr>
-          <a:lstStyle/>
-          <a:p>
-            <a:pPr algn="ctr"/>
-            <a:r>
-              <a:rPr sz="3060" b="1" i="0">
-                <a:solidFill>
-                  <a:srgbClr val="FFFFFF"/>
-                </a:solidFill>
-                <a:latin typeface="Arial"/>
-              </a:rPr>
-              <a:t>Juntam-se a toda a natureza em testemunho mudo</a:t>
+            <a:off x="640080" y="4128516"/>
+            <a:ext cx="10911535" cy="310896"/>
+          </a:xfrm>
+          <a:prstGeom prst="rect">
+            <a:avLst/>
+          </a:prstGeom>
+          <a:noFill/>
+        </p:spPr>
+        <p:txBody>
+          <a:bodyPr wrap="square">
+            <a:spAutoFit/>
+          </a:bodyPr>
+          <a:lstStyle/>
+          <a:p>
+            <a:pPr algn="ctr"/>
+            <a:r>
+              <a:rPr sz="2000" b="0" i="0">
+                <a:solidFill>
+                  <a:srgbClr val="828282"/>
+                </a:solidFill>
+                <a:latin typeface="Arial"/>
+              </a:rPr>
+              <a:t>罪を赦し平安を</a:t>
             </a:r>
           </a:p>
         </p:txBody>
@@ -4743,29 +4575,29 @@
         </p:nvSpPr>
         <p:spPr>
           <a:xfrm>
-            <a:off x="594360" y="4251960"/>
-            <a:ext cx="11002975" cy="347472"/>
-          </a:xfrm>
-          <a:prstGeom prst="rect">
-            <a:avLst/>
-          </a:prstGeom>
-          <a:noFill/>
-        </p:spPr>
-        <p:txBody>
-          <a:bodyPr wrap="square">
-            <a:spAutoFit/>
-          </a:bodyPr>
-          <a:lstStyle/>
-          <a:p>
-            <a:pPr algn="ctr"/>
-            <a:r>
-              <a:rPr sz="2200" b="0" i="1">
-                <a:solidFill>
-                  <a:srgbClr val="8C8C8C"/>
-                </a:solidFill>
-                <a:latin typeface="Arial"/>
-              </a:rPr>
-              <a:t/>
+            <a:off x="640080" y="4494276"/>
+            <a:ext cx="10911535" cy="310896"/>
+          </a:xfrm>
+          <a:prstGeom prst="rect">
+            <a:avLst/>
+          </a:prstGeom>
+          <a:noFill/>
+        </p:spPr>
+        <p:txBody>
+          <a:bodyPr wrap="square">
+            <a:spAutoFit/>
+          </a:bodyPr>
+          <a:lstStyle/>
+          <a:p>
+            <a:pPr algn="ctr"/>
+            <a:r>
+              <a:rPr sz="2000" b="0" i="0">
+                <a:solidFill>
+                  <a:srgbClr val="828282"/>
+                </a:solidFill>
+                <a:latin typeface="Arial"/>
+              </a:rPr>
+              <a:t>主は与えて励まし</a:t>
             </a:r>
           </a:p>
         </p:txBody>
@@ -4804,29 +4636,29 @@
         </p:nvSpPr>
         <p:spPr>
           <a:xfrm>
-            <a:off x="594360" y="2258568"/>
-            <a:ext cx="11002975" cy="685800"/>
-          </a:xfrm>
-          <a:prstGeom prst="rect">
-            <a:avLst/>
-          </a:prstGeom>
-          <a:noFill/>
-        </p:spPr>
-        <p:txBody>
-          <a:bodyPr wrap="square">
-            <a:spAutoFit/>
-          </a:bodyPr>
-          <a:lstStyle/>
-          <a:p>
-            <a:pPr algn="ctr"/>
-            <a:r>
-              <a:rPr sz="3200" b="1" i="0">
+            <a:off x="640080" y="2052828"/>
+            <a:ext cx="10911535" cy="731520"/>
+          </a:xfrm>
+          <a:prstGeom prst="rect">
+            <a:avLst/>
+          </a:prstGeom>
+          <a:noFill/>
+        </p:spPr>
+        <p:txBody>
+          <a:bodyPr wrap="square">
+            <a:spAutoFit/>
+          </a:bodyPr>
+          <a:lstStyle/>
+          <a:p>
+            <a:pPr algn="ctr"/>
+            <a:r>
+              <a:rPr sz="3800" b="1" i="0">
                 <a:solidFill>
                   <a:srgbClr val="FFFFFF"/>
                 </a:solidFill>
                 <a:latin typeface="Arial"/>
               </a:rPr>
-              <a:t>À Tua grande fidelidade, misericórdia e amor</a:t>
+              <a:t>Sol, lua e estrelas em seus cursos acima</a:t>
             </a:r>
           </a:p>
         </p:txBody>
@@ -4839,29 +4671,29 @@
         </p:nvSpPr>
         <p:spPr>
           <a:xfrm>
-            <a:off x="594360" y="2980944"/>
-            <a:ext cx="11002975" cy="347472"/>
-          </a:xfrm>
-          <a:prstGeom prst="rect">
-            <a:avLst/>
-          </a:prstGeom>
-          <a:noFill/>
-        </p:spPr>
-        <p:txBody>
-          <a:bodyPr wrap="square">
-            <a:spAutoFit/>
-          </a:bodyPr>
-          <a:lstStyle/>
-          <a:p>
-            <a:pPr algn="ctr"/>
-            <a:r>
-              <a:rPr sz="2200" b="0" i="1">
-                <a:solidFill>
-                  <a:srgbClr val="8C8C8C"/>
-                </a:solidFill>
-                <a:latin typeface="Arial"/>
-              </a:rPr>
-              <a:t/>
+            <a:off x="640080" y="2985516"/>
+            <a:ext cx="10911535" cy="731520"/>
+          </a:xfrm>
+          <a:prstGeom prst="rect">
+            <a:avLst/>
+          </a:prstGeom>
+          <a:noFill/>
+        </p:spPr>
+        <p:txBody>
+          <a:bodyPr wrap="square">
+            <a:spAutoFit/>
+          </a:bodyPr>
+          <a:lstStyle/>
+          <a:p>
+            <a:pPr algn="ctr"/>
+            <a:r>
+              <a:rPr sz="3300" b="1" i="0">
+                <a:solidFill>
+                  <a:srgbClr val="FFFFFF"/>
+                </a:solidFill>
+                <a:latin typeface="Arial"/>
+              </a:rPr>
+              <a:t>Juntam-se a toda a natureza em testemunho mudo</a:t>
             </a:r>
           </a:p>
         </p:txBody>
@@ -4874,29 +4706,29 @@
         </p:nvSpPr>
         <p:spPr>
           <a:xfrm>
-            <a:off x="594360" y="3529584"/>
-            <a:ext cx="11002975" cy="685800"/>
-          </a:xfrm>
-          <a:prstGeom prst="rect">
-            <a:avLst/>
-          </a:prstGeom>
-          <a:noFill/>
-        </p:spPr>
-        <p:txBody>
-          <a:bodyPr wrap="square">
-            <a:spAutoFit/>
-          </a:bodyPr>
-          <a:lstStyle/>
-          <a:p>
-            <a:pPr algn="ctr"/>
-            <a:r>
-              <a:rPr sz="4400" b="1" i="0">
-                <a:solidFill>
-                  <a:srgbClr val="FFFFFF"/>
-                </a:solidFill>
-                <a:latin typeface="Arial"/>
-              </a:rPr>
-              <a:t>Grande é Tua fidelidade</a:t>
+            <a:off x="640080" y="4128516"/>
+            <a:ext cx="10911535" cy="310896"/>
+          </a:xfrm>
+          <a:prstGeom prst="rect">
+            <a:avLst/>
+          </a:prstGeom>
+          <a:noFill/>
+        </p:spPr>
+        <p:txBody>
+          <a:bodyPr wrap="square">
+            <a:spAutoFit/>
+          </a:bodyPr>
+          <a:lstStyle/>
+          <a:p>
+            <a:pPr algn="ctr"/>
+            <a:r>
+              <a:rPr sz="2000" b="0" i="0">
+                <a:solidFill>
+                  <a:srgbClr val="828282"/>
+                </a:solidFill>
+                <a:latin typeface="Arial"/>
+              </a:rPr>
+              <a:t>力に満ち祝福に</a:t>
             </a:r>
           </a:p>
         </p:txBody>
@@ -4909,29 +4741,29 @@
         </p:nvSpPr>
         <p:spPr>
           <a:xfrm>
-            <a:off x="594360" y="4251960"/>
-            <a:ext cx="11002975" cy="347472"/>
-          </a:xfrm>
-          <a:prstGeom prst="rect">
-            <a:avLst/>
-          </a:prstGeom>
-          <a:noFill/>
-        </p:spPr>
-        <p:txBody>
-          <a:bodyPr wrap="square">
-            <a:spAutoFit/>
-          </a:bodyPr>
-          <a:lstStyle/>
-          <a:p>
-            <a:pPr algn="ctr"/>
-            <a:r>
-              <a:rPr sz="2200" b="0" i="1">
-                <a:solidFill>
-                  <a:srgbClr val="8C8C8C"/>
-                </a:solidFill>
-                <a:latin typeface="Arial"/>
-              </a:rPr>
-              <a:t/>
+            <a:off x="640080" y="4494276"/>
+            <a:ext cx="10911535" cy="310896"/>
+          </a:xfrm>
+          <a:prstGeom prst="rect">
+            <a:avLst/>
+          </a:prstGeom>
+          <a:noFill/>
+        </p:spPr>
+        <p:txBody>
+          <a:bodyPr wrap="square">
+            <a:spAutoFit/>
+          </a:bodyPr>
+          <a:lstStyle/>
+          <a:p>
+            <a:pPr algn="ctr"/>
+            <a:r>
+              <a:rPr sz="2000" b="0" i="0">
+                <a:solidFill>
+                  <a:srgbClr val="828282"/>
+                </a:solidFill>
+                <a:latin typeface="Arial"/>
+              </a:rPr>
+              <a:t>溢れさせて下さる</a:t>
             </a:r>
           </a:p>
         </p:txBody>
@@ -4970,134 +4802,64 @@
         </p:nvSpPr>
         <p:spPr>
           <a:xfrm>
-            <a:off x="594360" y="2258568"/>
-            <a:ext cx="11002975" cy="685800"/>
-          </a:xfrm>
-          <a:prstGeom prst="rect">
-            <a:avLst/>
-          </a:prstGeom>
-          <a:noFill/>
-        </p:spPr>
-        <p:txBody>
-          <a:bodyPr wrap="square">
-            <a:spAutoFit/>
-          </a:bodyPr>
-          <a:lstStyle/>
-          <a:p>
-            <a:pPr algn="ctr"/>
-            <a:r>
-              <a:rPr sz="4400" b="1" i="0">
+            <a:off x="640080" y="2052828"/>
+            <a:ext cx="10911535" cy="731520"/>
+          </a:xfrm>
+          <a:prstGeom prst="rect">
+            <a:avLst/>
+          </a:prstGeom>
+          <a:noFill/>
+        </p:spPr>
+        <p:txBody>
+          <a:bodyPr wrap="square">
+            <a:spAutoFit/>
+          </a:bodyPr>
+          <a:lstStyle/>
+          <a:p>
+            <a:pPr algn="ctr"/>
+            <a:r>
+              <a:rPr sz="3400" b="1" i="0">
                 <a:solidFill>
                   <a:srgbClr val="FFFFFF"/>
                 </a:solidFill>
                 <a:latin typeface="Arial"/>
               </a:rPr>
+              <a:t>À Tua grande fidelidade, misericórdia e amor</a:t>
+            </a:r>
+          </a:p>
+        </p:txBody>
+      </p:sp>
+      <p:sp>
+        <p:nvSpPr>
+          <p:cNvPr id="3" name="TextBox 2"/>
+          <p:cNvSpPr txBox="1"/>
+          <p:nvPr/>
+        </p:nvSpPr>
+        <p:spPr>
+          <a:xfrm>
+            <a:off x="640080" y="2985516"/>
+            <a:ext cx="10911535" cy="731520"/>
+          </a:xfrm>
+          <a:prstGeom prst="rect">
+            <a:avLst/>
+          </a:prstGeom>
+          <a:noFill/>
+        </p:spPr>
+        <p:txBody>
+          <a:bodyPr wrap="square">
+            <a:spAutoFit/>
+          </a:bodyPr>
+          <a:lstStyle/>
+          <a:p>
+            <a:pPr algn="ctr"/>
+            <a:r>
+              <a:rPr sz="4800" b="1" i="0">
+                <a:solidFill>
+                  <a:srgbClr val="FFFFFF"/>
+                </a:solidFill>
+                <a:latin typeface="Arial"/>
+              </a:rPr>
               <a:t>Grande é Tua fidelidade</a:t>
-            </a:r>
-          </a:p>
-        </p:txBody>
-      </p:sp>
-      <p:sp>
-        <p:nvSpPr>
-          <p:cNvPr id="3" name="TextBox 2"/>
-          <p:cNvSpPr txBox="1"/>
-          <p:nvPr/>
-        </p:nvSpPr>
-        <p:spPr>
-          <a:xfrm>
-            <a:off x="594360" y="2980944"/>
-            <a:ext cx="11002975" cy="347472"/>
-          </a:xfrm>
-          <a:prstGeom prst="rect">
-            <a:avLst/>
-          </a:prstGeom>
-          <a:noFill/>
-        </p:spPr>
-        <p:txBody>
-          <a:bodyPr wrap="square">
-            <a:spAutoFit/>
-          </a:bodyPr>
-          <a:lstStyle/>
-          <a:p>
-            <a:pPr algn="ctr"/>
-            <a:r>
-              <a:rPr sz="2200" b="0" i="1">
-                <a:solidFill>
-                  <a:srgbClr val="8C8C8C"/>
-                </a:solidFill>
-                <a:latin typeface="Arial"/>
-              </a:rPr>
-              <a:t/>
-            </a:r>
-          </a:p>
-        </p:txBody>
-      </p:sp>
-      <p:sp>
-        <p:nvSpPr>
-          <p:cNvPr id="4" name="TextBox 3"/>
-          <p:cNvSpPr txBox="1"/>
-          <p:nvPr/>
-        </p:nvSpPr>
-        <p:spPr>
-          <a:xfrm>
-            <a:off x="594360" y="3529584"/>
-            <a:ext cx="11002975" cy="685800"/>
-          </a:xfrm>
-          <a:prstGeom prst="rect">
-            <a:avLst/>
-          </a:prstGeom>
-          <a:noFill/>
-        </p:spPr>
-        <p:txBody>
-          <a:bodyPr wrap="square">
-            <a:spAutoFit/>
-          </a:bodyPr>
-          <a:lstStyle/>
-          <a:p>
-            <a:pPr algn="ctr"/>
-            <a:r>
-              <a:rPr sz="4400" b="1" i="0">
-                <a:solidFill>
-                  <a:srgbClr val="FFFFFF"/>
-                </a:solidFill>
-                <a:latin typeface="Arial"/>
-              </a:rPr>
-              <a:t>Grande é Tua fidelidade</a:t>
-            </a:r>
-          </a:p>
-        </p:txBody>
-      </p:sp>
-      <p:sp>
-        <p:nvSpPr>
-          <p:cNvPr id="5" name="TextBox 4"/>
-          <p:cNvSpPr txBox="1"/>
-          <p:nvPr/>
-        </p:nvSpPr>
-        <p:spPr>
-          <a:xfrm>
-            <a:off x="594360" y="4251960"/>
-            <a:ext cx="11002975" cy="347472"/>
-          </a:xfrm>
-          <a:prstGeom prst="rect">
-            <a:avLst/>
-          </a:prstGeom>
-          <a:noFill/>
-        </p:spPr>
-        <p:txBody>
-          <a:bodyPr wrap="square">
-            <a:spAutoFit/>
-          </a:bodyPr>
-          <a:lstStyle/>
-          <a:p>
-            <a:pPr algn="ctr"/>
-            <a:r>
-              <a:rPr sz="2200" b="0" i="1">
-                <a:solidFill>
-                  <a:srgbClr val="8C8C8C"/>
-                </a:solidFill>
-                <a:latin typeface="Arial"/>
-              </a:rPr>
-              <a:t/>
             </a:r>
           </a:p>
         </p:txBody>
@@ -5136,29 +4898,29 @@
         </p:nvSpPr>
         <p:spPr>
           <a:xfrm>
-            <a:off x="594360" y="2258568"/>
-            <a:ext cx="11002975" cy="685800"/>
-          </a:xfrm>
-          <a:prstGeom prst="rect">
-            <a:avLst/>
-          </a:prstGeom>
-          <a:noFill/>
-        </p:spPr>
-        <p:txBody>
-          <a:bodyPr wrap="square">
-            <a:spAutoFit/>
-          </a:bodyPr>
-          <a:lstStyle/>
-          <a:p>
-            <a:pPr algn="ctr"/>
-            <a:r>
-              <a:rPr sz="3128" b="1" i="0">
+            <a:off x="640080" y="2052828"/>
+            <a:ext cx="10911535" cy="731520"/>
+          </a:xfrm>
+          <a:prstGeom prst="rect">
+            <a:avLst/>
+          </a:prstGeom>
+          <a:noFill/>
+        </p:spPr>
+        <p:txBody>
+          <a:bodyPr wrap="square">
+            <a:spAutoFit/>
+          </a:bodyPr>
+          <a:lstStyle/>
+          <a:p>
+            <a:pPr algn="ctr"/>
+            <a:r>
+              <a:rPr sz="4800" b="1" i="0">
                 <a:solidFill>
                   <a:srgbClr val="FFFFFF"/>
                 </a:solidFill>
                 <a:latin typeface="Arial"/>
               </a:rPr>
-              <a:t>Manhã após manhã novas misericórdias encontro</a:t>
+              <a:t>Grande é Tua fidelidade</a:t>
             </a:r>
           </a:p>
         </p:txBody>
@@ -5171,29 +4933,29 @@
         </p:nvSpPr>
         <p:spPr>
           <a:xfrm>
-            <a:off x="594360" y="2980944"/>
-            <a:ext cx="11002975" cy="347472"/>
-          </a:xfrm>
-          <a:prstGeom prst="rect">
-            <a:avLst/>
-          </a:prstGeom>
-          <a:noFill/>
-        </p:spPr>
-        <p:txBody>
-          <a:bodyPr wrap="square">
-            <a:spAutoFit/>
-          </a:bodyPr>
-          <a:lstStyle/>
-          <a:p>
-            <a:pPr algn="ctr"/>
-            <a:r>
-              <a:rPr sz="2200" b="0" i="1">
-                <a:solidFill>
-                  <a:srgbClr val="8C8C8C"/>
-                </a:solidFill>
-                <a:latin typeface="Arial"/>
-              </a:rPr>
-              <a:t/>
+            <a:off x="640080" y="2985516"/>
+            <a:ext cx="10911535" cy="731520"/>
+          </a:xfrm>
+          <a:prstGeom prst="rect">
+            <a:avLst/>
+          </a:prstGeom>
+          <a:noFill/>
+        </p:spPr>
+        <p:txBody>
+          <a:bodyPr wrap="square">
+            <a:spAutoFit/>
+          </a:bodyPr>
+          <a:lstStyle/>
+          <a:p>
+            <a:pPr algn="ctr"/>
+            <a:r>
+              <a:rPr sz="4800" b="1" i="0">
+                <a:solidFill>
+                  <a:srgbClr val="FFFFFF"/>
+                </a:solidFill>
+                <a:latin typeface="Arial"/>
+              </a:rPr>
+              <a:t>Grande é Tua fidelidade</a:t>
             </a:r>
           </a:p>
         </p:txBody>
@@ -5206,29 +4968,29 @@
         </p:nvSpPr>
         <p:spPr>
           <a:xfrm>
-            <a:off x="594360" y="3529584"/>
-            <a:ext cx="11002975" cy="685800"/>
-          </a:xfrm>
-          <a:prstGeom prst="rect">
-            <a:avLst/>
-          </a:prstGeom>
-          <a:noFill/>
-        </p:spPr>
-        <p:txBody>
-          <a:bodyPr wrap="square">
-            <a:spAutoFit/>
-          </a:bodyPr>
-          <a:lstStyle/>
-          <a:p>
-            <a:pPr algn="ctr"/>
-            <a:r>
-              <a:rPr sz="3805" b="1" i="0">
-                <a:solidFill>
-                  <a:srgbClr val="FFFFFF"/>
-                </a:solidFill>
-                <a:latin typeface="Arial"/>
-              </a:rPr>
-              <a:t>Tudo que preciso Tua mão sempre provê</a:t>
+            <a:off x="640080" y="4128516"/>
+            <a:ext cx="10911535" cy="310896"/>
+          </a:xfrm>
+          <a:prstGeom prst="rect">
+            <a:avLst/>
+          </a:prstGeom>
+          <a:noFill/>
+        </p:spPr>
+        <p:txBody>
+          <a:bodyPr wrap="square">
+            <a:spAutoFit/>
+          </a:bodyPr>
+          <a:lstStyle/>
+          <a:p>
+            <a:pPr algn="ctr"/>
+            <a:r>
+              <a:rPr sz="2000" b="0" i="0">
+                <a:solidFill>
+                  <a:srgbClr val="828282"/>
+                </a:solidFill>
+                <a:latin typeface="Arial"/>
+              </a:rPr>
+              <a:t>すばらしい主　その真実は</a:t>
             </a:r>
           </a:p>
         </p:txBody>
@@ -5241,29 +5003,29 @@
         </p:nvSpPr>
         <p:spPr>
           <a:xfrm>
-            <a:off x="594360" y="4251960"/>
-            <a:ext cx="11002975" cy="347472"/>
-          </a:xfrm>
-          <a:prstGeom prst="rect">
-            <a:avLst/>
-          </a:prstGeom>
-          <a:noFill/>
-        </p:spPr>
-        <p:txBody>
-          <a:bodyPr wrap="square">
-            <a:spAutoFit/>
-          </a:bodyPr>
-          <a:lstStyle/>
-          <a:p>
-            <a:pPr algn="ctr"/>
-            <a:r>
-              <a:rPr sz="2200" b="0" i="1">
-                <a:solidFill>
-                  <a:srgbClr val="8C8C8C"/>
-                </a:solidFill>
-                <a:latin typeface="Arial"/>
-              </a:rPr>
-              <a:t/>
+            <a:off x="640080" y="4494276"/>
+            <a:ext cx="10911535" cy="310896"/>
+          </a:xfrm>
+          <a:prstGeom prst="rect">
+            <a:avLst/>
+          </a:prstGeom>
+          <a:noFill/>
+        </p:spPr>
+        <p:txBody>
+          <a:bodyPr wrap="square">
+            <a:spAutoFit/>
+          </a:bodyPr>
+          <a:lstStyle/>
+          <a:p>
+            <a:pPr algn="ctr"/>
+            <a:r>
+              <a:rPr sz="2000" b="0" i="0">
+                <a:solidFill>
+                  <a:srgbClr val="828282"/>
+                </a:solidFill>
+                <a:latin typeface="Arial"/>
+              </a:rPr>
+              <a:t>朝毎にあたらしく</a:t>
             </a:r>
           </a:p>
         </p:txBody>
@@ -5302,23 +5064,23 @@
         </p:nvSpPr>
         <p:spPr>
           <a:xfrm>
-            <a:off x="594360" y="1837944"/>
-            <a:ext cx="11002975" cy="685800"/>
-          </a:xfrm>
-          <a:prstGeom prst="rect">
-            <a:avLst/>
-          </a:prstGeom>
-          <a:noFill/>
-        </p:spPr>
-        <p:txBody>
-          <a:bodyPr wrap="square">
-            <a:spAutoFit/>
-          </a:bodyPr>
-          <a:lstStyle/>
-          <a:p>
-            <a:pPr algn="ctr"/>
-            <a:r>
-              <a:rPr sz="4400" b="1" i="0">
+            <a:off x="640080" y="1650492"/>
+            <a:ext cx="10911535" cy="731520"/>
+          </a:xfrm>
+          <a:prstGeom prst="rect">
+            <a:avLst/>
+          </a:prstGeom>
+          <a:noFill/>
+        </p:spPr>
+        <p:txBody>
+          <a:bodyPr wrap="square">
+            <a:spAutoFit/>
+          </a:bodyPr>
+          <a:lstStyle/>
+          <a:p>
+            <a:pPr algn="ctr"/>
+            <a:r>
+              <a:rPr sz="4800" b="1" i="0">
                 <a:solidFill>
                   <a:srgbClr val="FFFFFF"/>
                 </a:solidFill>
@@ -5337,8 +5099,8 @@
         </p:nvSpPr>
         <p:spPr>
           <a:xfrm>
-            <a:off x="594360" y="2560320"/>
-            <a:ext cx="11002975" cy="384048"/>
+            <a:off x="640080" y="2418588"/>
+            <a:ext cx="10911535" cy="365760"/>
           </a:xfrm>
           <a:prstGeom prst="rect">
             <a:avLst/>
@@ -5355,7 +5117,7 @@
             <a:r>
               <a:rPr sz="2400" b="0" i="1">
                 <a:solidFill>
-                  <a:srgbClr val="B4B4B4"/>
+                  <a:srgbClr val="AAAAAA"/>
                 </a:solidFill>
                 <a:latin typeface="Arial"/>
               </a:rPr>
@@ -5372,8 +5134,78 @@
         </p:nvSpPr>
         <p:spPr>
           <a:xfrm>
-            <a:off x="594360" y="2980944"/>
-            <a:ext cx="11002975" cy="347472"/>
+            <a:off x="640080" y="2985516"/>
+            <a:ext cx="10911535" cy="731520"/>
+          </a:xfrm>
+          <a:prstGeom prst="rect">
+            <a:avLst/>
+          </a:prstGeom>
+          <a:noFill/>
+        </p:spPr>
+        <p:txBody>
+          <a:bodyPr wrap="square">
+            <a:spAutoFit/>
+          </a:bodyPr>
+          <a:lstStyle/>
+          <a:p>
+            <a:pPr algn="ctr"/>
+            <a:r>
+              <a:rPr sz="4800" b="1" i="0">
+                <a:solidFill>
+                  <a:srgbClr val="FFFFFF"/>
+                </a:solidFill>
+                <a:latin typeface="Arial"/>
+              </a:rPr>
+              <a:t>尽きることがありません</a:t>
+            </a:r>
+          </a:p>
+        </p:txBody>
+      </p:sp>
+      <p:sp>
+        <p:nvSpPr>
+          <p:cNvPr id="5" name="TextBox 4"/>
+          <p:cNvSpPr txBox="1"/>
+          <p:nvPr/>
+        </p:nvSpPr>
+        <p:spPr>
+          <a:xfrm>
+            <a:off x="640080" y="3753612"/>
+            <a:ext cx="10911535" cy="365760"/>
+          </a:xfrm>
+          <a:prstGeom prst="rect">
+            <a:avLst/>
+          </a:prstGeom>
+          <a:noFill/>
+        </p:spPr>
+        <p:txBody>
+          <a:bodyPr wrap="square">
+            <a:spAutoFit/>
+          </a:bodyPr>
+          <a:lstStyle/>
+          <a:p>
+            <a:pPr algn="ctr"/>
+            <a:r>
+              <a:rPr sz="2400" b="0" i="1">
+                <a:solidFill>
+                  <a:srgbClr val="AAAAAA"/>
+                </a:solidFill>
+                <a:latin typeface="Arial"/>
+              </a:rPr>
+              <a:t>tsukiru koto ga arimasen</a:t>
+            </a:r>
+          </a:p>
+        </p:txBody>
+      </p:sp>
+      <p:sp>
+        <p:nvSpPr>
+          <p:cNvPr id="6" name="TextBox 5"/>
+          <p:cNvSpPr txBox="1"/>
+          <p:nvPr/>
+        </p:nvSpPr>
+        <p:spPr>
+          <a:xfrm>
+            <a:off x="640080" y="4530852"/>
+            <a:ext cx="10911535" cy="310896"/>
           </a:xfrm>
           <a:prstGeom prst="rect">
             <a:avLst/>
@@ -5390,81 +5222,11 @@
             <a:r>
               <a:rPr sz="2000" b="0" i="1">
                 <a:solidFill>
-                  <a:srgbClr val="8C8C8C"/>
-                </a:solidFill>
-                <a:latin typeface="Arial"/>
-              </a:rPr>
-              <a:t/>
-            </a:r>
-          </a:p>
-        </p:txBody>
-      </p:sp>
-      <p:sp>
-        <p:nvSpPr>
-          <p:cNvPr id="5" name="TextBox 4"/>
-          <p:cNvSpPr txBox="1"/>
-          <p:nvPr/>
-        </p:nvSpPr>
-        <p:spPr>
-          <a:xfrm>
-            <a:off x="594360" y="3529584"/>
-            <a:ext cx="11002975" cy="685800"/>
-          </a:xfrm>
-          <a:prstGeom prst="rect">
-            <a:avLst/>
-          </a:prstGeom>
-          <a:noFill/>
-        </p:spPr>
-        <p:txBody>
-          <a:bodyPr wrap="square">
-            <a:spAutoFit/>
-          </a:bodyPr>
-          <a:lstStyle/>
-          <a:p>
-            <a:pPr algn="ctr"/>
-            <a:r>
-              <a:rPr sz="4400" b="1" i="0">
-                <a:solidFill>
-                  <a:srgbClr val="FFFFFF"/>
-                </a:solidFill>
-                <a:latin typeface="Arial"/>
-              </a:rPr>
-              <a:t>尽きることがありません</a:t>
-            </a:r>
-          </a:p>
-        </p:txBody>
-      </p:sp>
-      <p:sp>
-        <p:nvSpPr>
-          <p:cNvPr id="6" name="TextBox 5"/>
-          <p:cNvSpPr txBox="1"/>
-          <p:nvPr/>
-        </p:nvSpPr>
-        <p:spPr>
-          <a:xfrm>
-            <a:off x="594360" y="4251960"/>
-            <a:ext cx="11002975" cy="384048"/>
-          </a:xfrm>
-          <a:prstGeom prst="rect">
-            <a:avLst/>
-          </a:prstGeom>
-          <a:noFill/>
-        </p:spPr>
-        <p:txBody>
-          <a:bodyPr wrap="square">
-            <a:spAutoFit/>
-          </a:bodyPr>
-          <a:lstStyle/>
-          <a:p>
-            <a:pPr algn="ctr"/>
-            <a:r>
-              <a:rPr sz="2400" b="0" i="1">
-                <a:solidFill>
-                  <a:srgbClr val="B4B4B4"/>
-                </a:solidFill>
-                <a:latin typeface="Arial"/>
-              </a:rPr>
-              <a:t>tsukiru koto ga arimasen</a:t>
+                  <a:srgbClr val="828282"/>
+                </a:solidFill>
+                <a:latin typeface="Arial"/>
+              </a:rPr>
+              <a:t>Não há sombra de mudança em Ti</a:t>
             </a:r>
           </a:p>
         </p:txBody>
@@ -5477,8 +5239,8 @@
         </p:nvSpPr>
         <p:spPr>
           <a:xfrm>
-            <a:off x="594360" y="4672584"/>
-            <a:ext cx="11002975" cy="347472"/>
+            <a:off x="640080" y="4896612"/>
+            <a:ext cx="10911535" cy="310896"/>
           </a:xfrm>
           <a:prstGeom prst="rect">
             <a:avLst/>
@@ -5495,11 +5257,11 @@
             <a:r>
               <a:rPr sz="2000" b="0" i="1">
                 <a:solidFill>
-                  <a:srgbClr val="8C8C8C"/>
-                </a:solidFill>
-                <a:latin typeface="Arial"/>
-              </a:rPr>
-              <a:t/>
+                  <a:srgbClr val="828282"/>
+                </a:solidFill>
+                <a:latin typeface="Arial"/>
+              </a:rPr>
+              <a:t>Não me abandonas; como prometeste</a:t>
             </a:r>
           </a:p>
         </p:txBody>
@@ -5538,29 +5300,29 @@
         </p:nvSpPr>
         <p:spPr>
           <a:xfrm>
-            <a:off x="594360" y="2258568"/>
-            <a:ext cx="11002975" cy="685800"/>
-          </a:xfrm>
-          <a:prstGeom prst="rect">
-            <a:avLst/>
-          </a:prstGeom>
-          <a:noFill/>
-        </p:spPr>
-        <p:txBody>
-          <a:bodyPr wrap="square">
-            <a:spAutoFit/>
-          </a:bodyPr>
-          <a:lstStyle/>
-          <a:p>
-            <a:pPr algn="ctr"/>
-            <a:r>
-              <a:rPr sz="4400" b="1" i="0">
+            <a:off x="640080" y="2052828"/>
+            <a:ext cx="10911535" cy="731520"/>
+          </a:xfrm>
+          <a:prstGeom prst="rect">
+            <a:avLst/>
+          </a:prstGeom>
+          <a:noFill/>
+        </p:spPr>
+        <p:txBody>
+          <a:bodyPr wrap="square">
+            <a:spAutoFit/>
+          </a:bodyPr>
+          <a:lstStyle/>
+          <a:p>
+            <a:pPr algn="ctr"/>
+            <a:r>
+              <a:rPr sz="3400" b="1" i="0">
                 <a:solidFill>
                   <a:srgbClr val="FFFFFF"/>
                 </a:solidFill>
                 <a:latin typeface="Arial"/>
               </a:rPr>
-              <a:t>Grande é Tua fidelidade, Senhor</a:t>
+              <a:t>Manhã após manhã novas misericórdias encontro</a:t>
             </a:r>
           </a:p>
         </p:txBody>
@@ -5573,29 +5335,29 @@
         </p:nvSpPr>
         <p:spPr>
           <a:xfrm>
-            <a:off x="594360" y="2980944"/>
-            <a:ext cx="11002975" cy="347472"/>
-          </a:xfrm>
-          <a:prstGeom prst="rect">
-            <a:avLst/>
-          </a:prstGeom>
-          <a:noFill/>
-        </p:spPr>
-        <p:txBody>
-          <a:bodyPr wrap="square">
-            <a:spAutoFit/>
-          </a:bodyPr>
-          <a:lstStyle/>
-          <a:p>
-            <a:pPr algn="ctr"/>
-            <a:r>
-              <a:rPr sz="2200" b="0" i="1">
-                <a:solidFill>
-                  <a:srgbClr val="8C8C8C"/>
-                </a:solidFill>
-                <a:latin typeface="Arial"/>
-              </a:rPr>
-              <a:t/>
+            <a:off x="640080" y="2985516"/>
+            <a:ext cx="10911535" cy="731520"/>
+          </a:xfrm>
+          <a:prstGeom prst="rect">
+            <a:avLst/>
+          </a:prstGeom>
+          <a:noFill/>
+        </p:spPr>
+        <p:txBody>
+          <a:bodyPr wrap="square">
+            <a:spAutoFit/>
+          </a:bodyPr>
+          <a:lstStyle/>
+          <a:p>
+            <a:pPr algn="ctr"/>
+            <a:r>
+              <a:rPr sz="4100" b="1" i="0">
+                <a:solidFill>
+                  <a:srgbClr val="FFFFFF"/>
+                </a:solidFill>
+                <a:latin typeface="Arial"/>
+              </a:rPr>
+              <a:t>Tudo que preciso Tua mão sempre provê</a:t>
             </a:r>
           </a:p>
         </p:txBody>
@@ -5608,29 +5370,29 @@
         </p:nvSpPr>
         <p:spPr>
           <a:xfrm>
-            <a:off x="594360" y="3529584"/>
-            <a:ext cx="11002975" cy="685800"/>
-          </a:xfrm>
-          <a:prstGeom prst="rect">
-            <a:avLst/>
-          </a:prstGeom>
-          <a:noFill/>
-        </p:spPr>
-        <p:txBody>
-          <a:bodyPr wrap="square">
-            <a:spAutoFit/>
-          </a:bodyPr>
-          <a:lstStyle/>
-          <a:p>
-            <a:pPr algn="ctr"/>
-            <a:r>
-              <a:rPr sz="4400" b="1" i="0">
-                <a:solidFill>
-                  <a:srgbClr val="FFFFFF"/>
-                </a:solidFill>
-                <a:latin typeface="Arial"/>
-              </a:rPr>
-              <a:t>Grande é Tua fidelidade</a:t>
+            <a:off x="640080" y="4128516"/>
+            <a:ext cx="10911535" cy="310896"/>
+          </a:xfrm>
+          <a:prstGeom prst="rect">
+            <a:avLst/>
+          </a:prstGeom>
+          <a:noFill/>
+        </p:spPr>
+        <p:txBody>
+          <a:bodyPr wrap="square">
+            <a:spAutoFit/>
+          </a:bodyPr>
+          <a:lstStyle/>
+          <a:p>
+            <a:pPr algn="ctr"/>
+            <a:r>
+              <a:rPr sz="2000" b="0" i="0">
+                <a:solidFill>
+                  <a:srgbClr val="828282"/>
+                </a:solidFill>
+                <a:latin typeface="Arial"/>
+              </a:rPr>
+              <a:t>深い恵み知らされて</a:t>
             </a:r>
           </a:p>
         </p:txBody>
@@ -5643,29 +5405,29 @@
         </p:nvSpPr>
         <p:spPr>
           <a:xfrm>
-            <a:off x="594360" y="4251960"/>
-            <a:ext cx="11002975" cy="347472"/>
-          </a:xfrm>
-          <a:prstGeom prst="rect">
-            <a:avLst/>
-          </a:prstGeom>
-          <a:noFill/>
-        </p:spPr>
-        <p:txBody>
-          <a:bodyPr wrap="square">
-            <a:spAutoFit/>
-          </a:bodyPr>
-          <a:lstStyle/>
-          <a:p>
-            <a:pPr algn="ctr"/>
-            <a:r>
-              <a:rPr sz="2200" b="0" i="1">
-                <a:solidFill>
-                  <a:srgbClr val="8C8C8C"/>
-                </a:solidFill>
-                <a:latin typeface="Arial"/>
-              </a:rPr>
-              <a:t/>
+            <a:off x="640080" y="4494276"/>
+            <a:ext cx="10911535" cy="310896"/>
+          </a:xfrm>
+          <a:prstGeom prst="rect">
+            <a:avLst/>
+          </a:prstGeom>
+          <a:noFill/>
+        </p:spPr>
+        <p:txBody>
+          <a:bodyPr wrap="square">
+            <a:spAutoFit/>
+          </a:bodyPr>
+          <a:lstStyle/>
+          <a:p>
+            <a:pPr algn="ctr"/>
+            <a:r>
+              <a:rPr sz="2000" b="0" i="0">
+                <a:solidFill>
+                  <a:srgbClr val="828282"/>
+                </a:solidFill>
+                <a:latin typeface="Arial"/>
+              </a:rPr>
+              <a:t>賛美します主の御名</a:t>
             </a:r>
           </a:p>
         </p:txBody>
@@ -5704,29 +5466,29 @@
         </p:nvSpPr>
         <p:spPr>
           <a:xfrm>
-            <a:off x="594360" y="2258568"/>
-            <a:ext cx="11002975" cy="685800"/>
-          </a:xfrm>
-          <a:prstGeom prst="rect">
-            <a:avLst/>
-          </a:prstGeom>
-          <a:noFill/>
-        </p:spPr>
-        <p:txBody>
-          <a:bodyPr wrap="square">
-            <a:spAutoFit/>
-          </a:bodyPr>
-          <a:lstStyle/>
-          <a:p>
-            <a:pPr algn="ctr"/>
-            <a:r>
-              <a:rPr sz="3128" b="1" i="0">
+            <a:off x="640080" y="2052828"/>
+            <a:ext cx="10911535" cy="731520"/>
+          </a:xfrm>
+          <a:prstGeom prst="rect">
+            <a:avLst/>
+          </a:prstGeom>
+          <a:noFill/>
+        </p:spPr>
+        <p:txBody>
+          <a:bodyPr wrap="square">
+            <a:spAutoFit/>
+          </a:bodyPr>
+          <a:lstStyle/>
+          <a:p>
+            <a:pPr algn="ctr"/>
+            <a:r>
+              <a:rPr sz="4800" b="1" i="0">
                 <a:solidFill>
                   <a:srgbClr val="FFFFFF"/>
                 </a:solidFill>
                 <a:latin typeface="Arial"/>
               </a:rPr>
-              <a:t>Manhã após manhã novas misericórdias encontro</a:t>
+              <a:t>Grande é Tua fidelidade, Senhor</a:t>
             </a:r>
           </a:p>
         </p:txBody>
@@ -5739,99 +5501,29 @@
         </p:nvSpPr>
         <p:spPr>
           <a:xfrm>
-            <a:off x="594360" y="2980944"/>
-            <a:ext cx="11002975" cy="347472"/>
-          </a:xfrm>
-          <a:prstGeom prst="rect">
-            <a:avLst/>
-          </a:prstGeom>
-          <a:noFill/>
-        </p:spPr>
-        <p:txBody>
-          <a:bodyPr wrap="square">
-            <a:spAutoFit/>
-          </a:bodyPr>
-          <a:lstStyle/>
-          <a:p>
-            <a:pPr algn="ctr"/>
-            <a:r>
-              <a:rPr sz="2200" b="0" i="1">
-                <a:solidFill>
-                  <a:srgbClr val="8C8C8C"/>
-                </a:solidFill>
-                <a:latin typeface="Arial"/>
-              </a:rPr>
-              <a:t/>
-            </a:r>
-          </a:p>
-        </p:txBody>
-      </p:sp>
-      <p:sp>
-        <p:nvSpPr>
-          <p:cNvPr id="4" name="TextBox 3"/>
-          <p:cNvSpPr txBox="1"/>
-          <p:nvPr/>
-        </p:nvSpPr>
-        <p:spPr>
-          <a:xfrm>
-            <a:off x="594360" y="3529584"/>
-            <a:ext cx="11002975" cy="685800"/>
-          </a:xfrm>
-          <a:prstGeom prst="rect">
-            <a:avLst/>
-          </a:prstGeom>
-          <a:noFill/>
-        </p:spPr>
-        <p:txBody>
-          <a:bodyPr wrap="square">
-            <a:spAutoFit/>
-          </a:bodyPr>
-          <a:lstStyle/>
-          <a:p>
-            <a:pPr algn="ctr"/>
-            <a:r>
-              <a:rPr sz="3805" b="1" i="0">
+            <a:off x="640080" y="2985516"/>
+            <a:ext cx="10911535" cy="731520"/>
+          </a:xfrm>
+          <a:prstGeom prst="rect">
+            <a:avLst/>
+          </a:prstGeom>
+          <a:noFill/>
+        </p:spPr>
+        <p:txBody>
+          <a:bodyPr wrap="square">
+            <a:spAutoFit/>
+          </a:bodyPr>
+          <a:lstStyle/>
+          <a:p>
+            <a:pPr algn="ctr"/>
+            <a:r>
+              <a:rPr sz="4800" b="1" i="0">
                 <a:solidFill>
                   <a:srgbClr val="FFFFFF"/>
                 </a:solidFill>
                 <a:latin typeface="Arial"/>
               </a:rPr>
-              <a:t>Tudo que preciso Tua mão sempre provê</a:t>
-            </a:r>
-          </a:p>
-        </p:txBody>
-      </p:sp>
-      <p:sp>
-        <p:nvSpPr>
-          <p:cNvPr id="5" name="TextBox 4"/>
-          <p:cNvSpPr txBox="1"/>
-          <p:nvPr/>
-        </p:nvSpPr>
-        <p:spPr>
-          <a:xfrm>
-            <a:off x="594360" y="4251960"/>
-            <a:ext cx="11002975" cy="347472"/>
-          </a:xfrm>
-          <a:prstGeom prst="rect">
-            <a:avLst/>
-          </a:prstGeom>
-          <a:noFill/>
-        </p:spPr>
-        <p:txBody>
-          <a:bodyPr wrap="square">
-            <a:spAutoFit/>
-          </a:bodyPr>
-          <a:lstStyle/>
-          <a:p>
-            <a:pPr algn="ctr"/>
-            <a:r>
-              <a:rPr sz="2200" b="0" i="1">
-                <a:solidFill>
-                  <a:srgbClr val="8C8C8C"/>
-                </a:solidFill>
-                <a:latin typeface="Arial"/>
-              </a:rPr>
-              <a:t/>
+              <a:t>Grande é Tua fidelidade</a:t>
             </a:r>
           </a:p>
         </p:txBody>
@@ -5870,29 +5562,29 @@
         </p:nvSpPr>
         <p:spPr>
           <a:xfrm>
-            <a:off x="594360" y="2258568"/>
-            <a:ext cx="11002975" cy="685800"/>
-          </a:xfrm>
-          <a:prstGeom prst="rect">
-            <a:avLst/>
-          </a:prstGeom>
-          <a:noFill/>
-        </p:spPr>
-        <p:txBody>
-          <a:bodyPr wrap="square">
-            <a:spAutoFit/>
-          </a:bodyPr>
-          <a:lstStyle/>
-          <a:p>
-            <a:pPr algn="ctr"/>
-            <a:r>
-              <a:rPr sz="4400" b="1" i="0">
+            <a:off x="640080" y="2052828"/>
+            <a:ext cx="10911535" cy="731520"/>
+          </a:xfrm>
+          <a:prstGeom prst="rect">
+            <a:avLst/>
+          </a:prstGeom>
+          <a:noFill/>
+        </p:spPr>
+        <p:txBody>
+          <a:bodyPr wrap="square">
+            <a:spAutoFit/>
+          </a:bodyPr>
+          <a:lstStyle/>
+          <a:p>
+            <a:pPr algn="ctr"/>
+            <a:r>
+              <a:rPr sz="3400" b="1" i="0">
                 <a:solidFill>
                   <a:srgbClr val="FFFFFF"/>
                 </a:solidFill>
                 <a:latin typeface="Arial"/>
               </a:rPr>
-              <a:t>Grande é Tua fidelidade, Senhor</a:t>
+              <a:t>Manhã após manhã novas misericórdias encontro</a:t>
             </a:r>
           </a:p>
         </p:txBody>
@@ -5905,99 +5597,29 @@
         </p:nvSpPr>
         <p:spPr>
           <a:xfrm>
-            <a:off x="594360" y="2980944"/>
-            <a:ext cx="11002975" cy="347472"/>
-          </a:xfrm>
-          <a:prstGeom prst="rect">
-            <a:avLst/>
-          </a:prstGeom>
-          <a:noFill/>
-        </p:spPr>
-        <p:txBody>
-          <a:bodyPr wrap="square">
-            <a:spAutoFit/>
-          </a:bodyPr>
-          <a:lstStyle/>
-          <a:p>
-            <a:pPr algn="ctr"/>
-            <a:r>
-              <a:rPr sz="2200" b="0" i="1">
-                <a:solidFill>
-                  <a:srgbClr val="8C8C8C"/>
-                </a:solidFill>
-                <a:latin typeface="Arial"/>
-              </a:rPr>
-              <a:t/>
-            </a:r>
-          </a:p>
-        </p:txBody>
-      </p:sp>
-      <p:sp>
-        <p:nvSpPr>
-          <p:cNvPr id="4" name="TextBox 3"/>
-          <p:cNvSpPr txBox="1"/>
-          <p:nvPr/>
-        </p:nvSpPr>
-        <p:spPr>
-          <a:xfrm>
-            <a:off x="594360" y="3529584"/>
-            <a:ext cx="11002975" cy="685800"/>
-          </a:xfrm>
-          <a:prstGeom prst="rect">
-            <a:avLst/>
-          </a:prstGeom>
-          <a:noFill/>
-        </p:spPr>
-        <p:txBody>
-          <a:bodyPr wrap="square">
-            <a:spAutoFit/>
-          </a:bodyPr>
-          <a:lstStyle/>
-          <a:p>
-            <a:pPr algn="ctr"/>
-            <a:r>
-              <a:rPr sz="4400" b="1" i="0">
+            <a:off x="640080" y="2985516"/>
+            <a:ext cx="10911535" cy="731520"/>
+          </a:xfrm>
+          <a:prstGeom prst="rect">
+            <a:avLst/>
+          </a:prstGeom>
+          <a:noFill/>
+        </p:spPr>
+        <p:txBody>
+          <a:bodyPr wrap="square">
+            <a:spAutoFit/>
+          </a:bodyPr>
+          <a:lstStyle/>
+          <a:p>
+            <a:pPr algn="ctr"/>
+            <a:r>
+              <a:rPr sz="4100" b="1" i="0">
                 <a:solidFill>
                   <a:srgbClr val="FFFFFF"/>
                 </a:solidFill>
                 <a:latin typeface="Arial"/>
               </a:rPr>
-              <a:t>Grande é Tua fidelidade</a:t>
-            </a:r>
-          </a:p>
-        </p:txBody>
-      </p:sp>
-      <p:sp>
-        <p:nvSpPr>
-          <p:cNvPr id="5" name="TextBox 4"/>
-          <p:cNvSpPr txBox="1"/>
-          <p:nvPr/>
-        </p:nvSpPr>
-        <p:spPr>
-          <a:xfrm>
-            <a:off x="594360" y="4251960"/>
-            <a:ext cx="11002975" cy="347472"/>
-          </a:xfrm>
-          <a:prstGeom prst="rect">
-            <a:avLst/>
-          </a:prstGeom>
-          <a:noFill/>
-        </p:spPr>
-        <p:txBody>
-          <a:bodyPr wrap="square">
-            <a:spAutoFit/>
-          </a:bodyPr>
-          <a:lstStyle/>
-          <a:p>
-            <a:pPr algn="ctr"/>
-            <a:r>
-              <a:rPr sz="2200" b="0" i="1">
-                <a:solidFill>
-                  <a:srgbClr val="8C8C8C"/>
-                </a:solidFill>
-                <a:latin typeface="Arial"/>
-              </a:rPr>
-              <a:t/>
+              <a:t>Tudo que preciso Tua mão sempre provê</a:t>
             </a:r>
           </a:p>
         </p:txBody>
@@ -6036,33 +5658,190 @@
         </p:nvSpPr>
         <p:spPr>
           <a:xfrm>
-            <a:off x="594360" y="2894076"/>
-            <a:ext cx="11002975" cy="685800"/>
-          </a:xfrm>
-          <a:prstGeom prst="rect">
-            <a:avLst/>
-          </a:prstGeom>
-          <a:noFill/>
-        </p:spPr>
-        <p:txBody>
-          <a:bodyPr wrap="square">
-            <a:spAutoFit/>
-          </a:bodyPr>
-          <a:lstStyle/>
-          <a:p>
-            <a:pPr algn="ctr"/>
-            <a:r>
-              <a:rPr sz="3352" b="1" i="0">
+            <a:off x="640080" y="2052828"/>
+            <a:ext cx="10911535" cy="731520"/>
+          </a:xfrm>
+          <a:prstGeom prst="rect">
+            <a:avLst/>
+          </a:prstGeom>
+          <a:noFill/>
+        </p:spPr>
+        <p:txBody>
+          <a:bodyPr wrap="square">
+            <a:spAutoFit/>
+          </a:bodyPr>
+          <a:lstStyle/>
+          <a:p>
+            <a:pPr algn="ctr"/>
+            <a:r>
+              <a:rPr sz="4800" b="1" i="0">
                 <a:solidFill>
                   <a:srgbClr val="FFFFFF"/>
                 </a:solidFill>
                 <a:latin typeface="Arial"/>
               </a:rPr>
+              <a:t>Grande é Tua fidelidade, Senhor</a:t>
+            </a:r>
+          </a:p>
+        </p:txBody>
+      </p:sp>
+      <p:sp>
+        <p:nvSpPr>
+          <p:cNvPr id="3" name="TextBox 2"/>
+          <p:cNvSpPr txBox="1"/>
+          <p:nvPr/>
+        </p:nvSpPr>
+        <p:spPr>
+          <a:xfrm>
+            <a:off x="640080" y="2985516"/>
+            <a:ext cx="10911535" cy="731520"/>
+          </a:xfrm>
+          <a:prstGeom prst="rect">
+            <a:avLst/>
+          </a:prstGeom>
+          <a:noFill/>
+        </p:spPr>
+        <p:txBody>
+          <a:bodyPr wrap="square">
+            <a:spAutoFit/>
+          </a:bodyPr>
+          <a:lstStyle/>
+          <a:p>
+            <a:pPr algn="ctr"/>
+            <a:r>
+              <a:rPr sz="4800" b="1" i="0">
+                <a:solidFill>
+                  <a:srgbClr val="FFFFFF"/>
+                </a:solidFill>
+                <a:latin typeface="Arial"/>
+              </a:rPr>
+              <a:t>Grande é Tua fidelidade</a:t>
+            </a:r>
+          </a:p>
+        </p:txBody>
+      </p:sp>
+    </p:spTree>
+  </p:cSld>
+  <p:clrMapOvr>
+    <a:masterClrMapping/>
+  </p:clrMapOvr>
+</p:sld>
+</file>
+
+<file path=ppt/slides/slide24.xml><?xml version="1.0" encoding="utf-8"?>
+<p:sld xmlns:a="http://schemas.openxmlformats.org/drawingml/2006/main" xmlns:p="http://schemas.openxmlformats.org/presentationml/2006/main" xmlns:r="http://schemas.openxmlformats.org/officeDocument/2006/relationships">
+  <p:cSld>
+    <p:bg>
+      <p:bgPr>
+        <a:solidFill>
+          <a:srgbClr val="000000"/>
+        </a:solidFill>
+        <a:effectLst/>
+      </p:bgPr>
+    </p:bg>
+    <p:spTree>
+      <p:nvGrpSpPr>
+        <p:cNvPr id="1" name=""/>
+        <p:cNvGrpSpPr/>
+        <p:nvPr/>
+      </p:nvGrpSpPr>
+      <p:grpSpPr/>
+      <p:sp>
+        <p:nvSpPr>
+          <p:cNvPr id="2" name="TextBox 1"/>
+          <p:cNvSpPr txBox="1"/>
+          <p:nvPr/>
+        </p:nvSpPr>
+        <p:spPr>
+          <a:xfrm>
+            <a:off x="640080" y="2702052"/>
+            <a:ext cx="10911535" cy="731520"/>
+          </a:xfrm>
+          <a:prstGeom prst="rect">
+            <a:avLst/>
+          </a:prstGeom>
+          <a:noFill/>
+        </p:spPr>
+        <p:txBody>
+          <a:bodyPr wrap="square">
+            <a:spAutoFit/>
+          </a:bodyPr>
+          <a:lstStyle/>
+          <a:p>
+            <a:pPr algn="ctr"/>
+            <a:r>
+              <a:rPr sz="3600" b="1" i="0">
+                <a:solidFill>
+                  <a:srgbClr val="FFFFFF"/>
+                </a:solidFill>
+                <a:latin typeface="Arial"/>
+              </a:rPr>
               <a:t>Perdão para o pecado e uma paz que perdura</a:t>
             </a:r>
           </a:p>
         </p:txBody>
       </p:sp>
+    </p:spTree>
+  </p:cSld>
+  <p:clrMapOvr>
+    <a:masterClrMapping/>
+  </p:clrMapOvr>
+</p:sld>
+</file>
+
+<file path=ppt/slides/slide25.xml><?xml version="1.0" encoding="utf-8"?>
+<p:sld xmlns:a="http://schemas.openxmlformats.org/drawingml/2006/main" xmlns:p="http://schemas.openxmlformats.org/presentationml/2006/main" xmlns:r="http://schemas.openxmlformats.org/officeDocument/2006/relationships">
+  <p:cSld>
+    <p:bg>
+      <p:bgPr>
+        <a:solidFill>
+          <a:srgbClr val="000000"/>
+        </a:solidFill>
+        <a:effectLst/>
+      </p:bgPr>
+    </p:bg>
+    <p:spTree>
+      <p:nvGrpSpPr>
+        <p:cNvPr id="1" name=""/>
+        <p:cNvGrpSpPr/>
+        <p:nvPr/>
+      </p:nvGrpSpPr>
+      <p:grpSpPr/>
+      <p:sp>
+        <p:nvSpPr>
+          <p:cNvPr id="2" name="TextBox 1"/>
+          <p:cNvSpPr txBox="1"/>
+          <p:nvPr/>
+        </p:nvSpPr>
+        <p:spPr>
+          <a:xfrm>
+            <a:off x="640080" y="2052828"/>
+            <a:ext cx="10911535" cy="731520"/>
+          </a:xfrm>
+          <a:prstGeom prst="rect">
+            <a:avLst/>
+          </a:prstGeom>
+          <a:noFill/>
+        </p:spPr>
+        <p:txBody>
+          <a:bodyPr wrap="square">
+            <a:spAutoFit/>
+          </a:bodyPr>
+          <a:lstStyle/>
+          <a:p>
+            <a:pPr algn="ctr"/>
+            <a:r>
+              <a:rPr sz="4800" b="1" i="0">
+                <a:solidFill>
+                  <a:srgbClr val="FFFFFF"/>
+                </a:solidFill>
+                <a:latin typeface="Arial"/>
+              </a:rPr>
+              <a:t>Grande é Tua fidelidade</a:t>
+            </a:r>
+          </a:p>
+        </p:txBody>
+      </p:sp>
       <p:sp>
         <p:nvSpPr>
           <p:cNvPr id="3" name="TextBox 2"/>
@@ -6071,29 +5850,553 @@
         </p:nvSpPr>
         <p:spPr>
           <a:xfrm>
-            <a:off x="594360" y="3616452"/>
-            <a:ext cx="11002975" cy="347472"/>
-          </a:xfrm>
-          <a:prstGeom prst="rect">
-            <a:avLst/>
-          </a:prstGeom>
-          <a:noFill/>
-        </p:spPr>
-        <p:txBody>
-          <a:bodyPr wrap="square">
-            <a:spAutoFit/>
-          </a:bodyPr>
-          <a:lstStyle/>
-          <a:p>
-            <a:pPr algn="ctr"/>
-            <a:r>
-              <a:rPr sz="2200" b="0" i="1">
-                <a:solidFill>
-                  <a:srgbClr val="8C8C8C"/>
+            <a:off x="640080" y="2985516"/>
+            <a:ext cx="10911535" cy="731520"/>
+          </a:xfrm>
+          <a:prstGeom prst="rect">
+            <a:avLst/>
+          </a:prstGeom>
+          <a:noFill/>
+        </p:spPr>
+        <p:txBody>
+          <a:bodyPr wrap="square">
+            <a:spAutoFit/>
+          </a:bodyPr>
+          <a:lstStyle/>
+          <a:p>
+            <a:pPr algn="ctr"/>
+            <a:r>
+              <a:rPr sz="4800" b="1" i="0">
+                <a:solidFill>
+                  <a:srgbClr val="FFFFFF"/>
+                </a:solidFill>
+                <a:latin typeface="Arial"/>
+              </a:rPr>
+              <a:t>Grande é Tua fidelidade</a:t>
+            </a:r>
+          </a:p>
+        </p:txBody>
+      </p:sp>
+      <p:sp>
+        <p:nvSpPr>
+          <p:cNvPr id="4" name="TextBox 3"/>
+          <p:cNvSpPr txBox="1"/>
+          <p:nvPr/>
+        </p:nvSpPr>
+        <p:spPr>
+          <a:xfrm>
+            <a:off x="640080" y="4128516"/>
+            <a:ext cx="10911535" cy="310896"/>
+          </a:xfrm>
+          <a:prstGeom prst="rect">
+            <a:avLst/>
+          </a:prstGeom>
+          <a:noFill/>
+        </p:spPr>
+        <p:txBody>
+          <a:bodyPr wrap="square">
+            <a:spAutoFit/>
+          </a:bodyPr>
+          <a:lstStyle/>
+          <a:p>
+            <a:pPr algn="ctr"/>
+            <a:r>
+              <a:rPr sz="2000" b="0" i="0">
+                <a:solidFill>
+                  <a:srgbClr val="828282"/>
                 </a:solidFill>
                 <a:latin typeface="Arial"/>
               </a:rPr>
               <a:t>すばらしい主　その真実は</a:t>
+            </a:r>
+          </a:p>
+        </p:txBody>
+      </p:sp>
+      <p:sp>
+        <p:nvSpPr>
+          <p:cNvPr id="5" name="TextBox 4"/>
+          <p:cNvSpPr txBox="1"/>
+          <p:nvPr/>
+        </p:nvSpPr>
+        <p:spPr>
+          <a:xfrm>
+            <a:off x="640080" y="4494276"/>
+            <a:ext cx="10911535" cy="310896"/>
+          </a:xfrm>
+          <a:prstGeom prst="rect">
+            <a:avLst/>
+          </a:prstGeom>
+          <a:noFill/>
+        </p:spPr>
+        <p:txBody>
+          <a:bodyPr wrap="square">
+            <a:spAutoFit/>
+          </a:bodyPr>
+          <a:lstStyle/>
+          <a:p>
+            <a:pPr algn="ctr"/>
+            <a:r>
+              <a:rPr sz="2000" b="0" i="0">
+                <a:solidFill>
+                  <a:srgbClr val="828282"/>
+                </a:solidFill>
+                <a:latin typeface="Arial"/>
+              </a:rPr>
+              <a:t>朝毎にあたらしく</a:t>
+            </a:r>
+          </a:p>
+        </p:txBody>
+      </p:sp>
+    </p:spTree>
+  </p:cSld>
+  <p:clrMapOvr>
+    <a:masterClrMapping/>
+  </p:clrMapOvr>
+</p:sld>
+</file>
+
+<file path=ppt/slides/slide26.xml><?xml version="1.0" encoding="utf-8"?>
+<p:sld xmlns:a="http://schemas.openxmlformats.org/drawingml/2006/main" xmlns:p="http://schemas.openxmlformats.org/presentationml/2006/main" xmlns:r="http://schemas.openxmlformats.org/officeDocument/2006/relationships">
+  <p:cSld>
+    <p:bg>
+      <p:bgPr>
+        <a:solidFill>
+          <a:srgbClr val="000000"/>
+        </a:solidFill>
+        <a:effectLst/>
+      </p:bgPr>
+    </p:bg>
+    <p:spTree>
+      <p:nvGrpSpPr>
+        <p:cNvPr id="1" name=""/>
+        <p:cNvGrpSpPr/>
+        <p:nvPr/>
+      </p:nvGrpSpPr>
+      <p:grpSpPr/>
+      <p:sp>
+        <p:nvSpPr>
+          <p:cNvPr id="2" name="TextBox 1"/>
+          <p:cNvSpPr txBox="1"/>
+          <p:nvPr/>
+        </p:nvSpPr>
+        <p:spPr>
+          <a:xfrm>
+            <a:off x="640080" y="2052828"/>
+            <a:ext cx="10911535" cy="731520"/>
+          </a:xfrm>
+          <a:prstGeom prst="rect">
+            <a:avLst/>
+          </a:prstGeom>
+          <a:noFill/>
+        </p:spPr>
+        <p:txBody>
+          <a:bodyPr wrap="square">
+            <a:spAutoFit/>
+          </a:bodyPr>
+          <a:lstStyle/>
+          <a:p>
+            <a:pPr algn="ctr"/>
+            <a:r>
+              <a:rPr sz="3400" b="1" i="0">
+                <a:solidFill>
+                  <a:srgbClr val="FFFFFF"/>
+                </a:solidFill>
+                <a:latin typeface="Arial"/>
+              </a:rPr>
+              <a:t>Manhã após manhã novas misericórdias encontro</a:t>
+            </a:r>
+          </a:p>
+        </p:txBody>
+      </p:sp>
+      <p:sp>
+        <p:nvSpPr>
+          <p:cNvPr id="3" name="TextBox 2"/>
+          <p:cNvSpPr txBox="1"/>
+          <p:nvPr/>
+        </p:nvSpPr>
+        <p:spPr>
+          <a:xfrm>
+            <a:off x="640080" y="2985516"/>
+            <a:ext cx="10911535" cy="731520"/>
+          </a:xfrm>
+          <a:prstGeom prst="rect">
+            <a:avLst/>
+          </a:prstGeom>
+          <a:noFill/>
+        </p:spPr>
+        <p:txBody>
+          <a:bodyPr wrap="square">
+            <a:spAutoFit/>
+          </a:bodyPr>
+          <a:lstStyle/>
+          <a:p>
+            <a:pPr algn="ctr"/>
+            <a:r>
+              <a:rPr sz="4100" b="1" i="0">
+                <a:solidFill>
+                  <a:srgbClr val="FFFFFF"/>
+                </a:solidFill>
+                <a:latin typeface="Arial"/>
+              </a:rPr>
+              <a:t>Tudo que preciso Tua mão sempre provê</a:t>
+            </a:r>
+          </a:p>
+        </p:txBody>
+      </p:sp>
+      <p:sp>
+        <p:nvSpPr>
+          <p:cNvPr id="4" name="TextBox 3"/>
+          <p:cNvSpPr txBox="1"/>
+          <p:nvPr/>
+        </p:nvSpPr>
+        <p:spPr>
+          <a:xfrm>
+            <a:off x="640080" y="4128516"/>
+            <a:ext cx="10911535" cy="310896"/>
+          </a:xfrm>
+          <a:prstGeom prst="rect">
+            <a:avLst/>
+          </a:prstGeom>
+          <a:noFill/>
+        </p:spPr>
+        <p:txBody>
+          <a:bodyPr wrap="square">
+            <a:spAutoFit/>
+          </a:bodyPr>
+          <a:lstStyle/>
+          <a:p>
+            <a:pPr algn="ctr"/>
+            <a:r>
+              <a:rPr sz="2000" b="0" i="0">
+                <a:solidFill>
+                  <a:srgbClr val="828282"/>
+                </a:solidFill>
+                <a:latin typeface="Arial"/>
+              </a:rPr>
+              <a:t>深い恵み知らされて</a:t>
+            </a:r>
+          </a:p>
+        </p:txBody>
+      </p:sp>
+      <p:sp>
+        <p:nvSpPr>
+          <p:cNvPr id="5" name="TextBox 4"/>
+          <p:cNvSpPr txBox="1"/>
+          <p:nvPr/>
+        </p:nvSpPr>
+        <p:spPr>
+          <a:xfrm>
+            <a:off x="640080" y="4494276"/>
+            <a:ext cx="10911535" cy="310896"/>
+          </a:xfrm>
+          <a:prstGeom prst="rect">
+            <a:avLst/>
+          </a:prstGeom>
+          <a:noFill/>
+        </p:spPr>
+        <p:txBody>
+          <a:bodyPr wrap="square">
+            <a:spAutoFit/>
+          </a:bodyPr>
+          <a:lstStyle/>
+          <a:p>
+            <a:pPr algn="ctr"/>
+            <a:r>
+              <a:rPr sz="2000" b="0" i="0">
+                <a:solidFill>
+                  <a:srgbClr val="828282"/>
+                </a:solidFill>
+                <a:latin typeface="Arial"/>
+              </a:rPr>
+              <a:t>賛美します主の御名</a:t>
+            </a:r>
+          </a:p>
+        </p:txBody>
+      </p:sp>
+    </p:spTree>
+  </p:cSld>
+  <p:clrMapOvr>
+    <a:masterClrMapping/>
+  </p:clrMapOvr>
+</p:sld>
+</file>
+
+<file path=ppt/slides/slide27.xml><?xml version="1.0" encoding="utf-8"?>
+<p:sld xmlns:a="http://schemas.openxmlformats.org/drawingml/2006/main" xmlns:p="http://schemas.openxmlformats.org/presentationml/2006/main" xmlns:r="http://schemas.openxmlformats.org/officeDocument/2006/relationships">
+  <p:cSld>
+    <p:bg>
+      <p:bgPr>
+        <a:solidFill>
+          <a:srgbClr val="000000"/>
+        </a:solidFill>
+        <a:effectLst/>
+      </p:bgPr>
+    </p:bg>
+    <p:spTree>
+      <p:nvGrpSpPr>
+        <p:cNvPr id="1" name=""/>
+        <p:cNvGrpSpPr/>
+        <p:nvPr/>
+      </p:nvGrpSpPr>
+      <p:grpSpPr/>
+      <p:sp>
+        <p:nvSpPr>
+          <p:cNvPr id="2" name="TextBox 1"/>
+          <p:cNvSpPr txBox="1"/>
+          <p:nvPr/>
+        </p:nvSpPr>
+        <p:spPr>
+          <a:xfrm>
+            <a:off x="640080" y="2052828"/>
+            <a:ext cx="10911535" cy="731520"/>
+          </a:xfrm>
+          <a:prstGeom prst="rect">
+            <a:avLst/>
+          </a:prstGeom>
+          <a:noFill/>
+        </p:spPr>
+        <p:txBody>
+          <a:bodyPr wrap="square">
+            <a:spAutoFit/>
+          </a:bodyPr>
+          <a:lstStyle/>
+          <a:p>
+            <a:pPr algn="ctr"/>
+            <a:r>
+              <a:rPr sz="4800" b="1" i="0">
+                <a:solidFill>
+                  <a:srgbClr val="FFFFFF"/>
+                </a:solidFill>
+                <a:latin typeface="Arial"/>
+              </a:rPr>
+              <a:t>Grande é Tua fidelidade, Senhor</a:t>
+            </a:r>
+          </a:p>
+        </p:txBody>
+      </p:sp>
+      <p:sp>
+        <p:nvSpPr>
+          <p:cNvPr id="3" name="TextBox 2"/>
+          <p:cNvSpPr txBox="1"/>
+          <p:nvPr/>
+        </p:nvSpPr>
+        <p:spPr>
+          <a:xfrm>
+            <a:off x="640080" y="2985516"/>
+            <a:ext cx="10911535" cy="731520"/>
+          </a:xfrm>
+          <a:prstGeom prst="rect">
+            <a:avLst/>
+          </a:prstGeom>
+          <a:noFill/>
+        </p:spPr>
+        <p:txBody>
+          <a:bodyPr wrap="square">
+            <a:spAutoFit/>
+          </a:bodyPr>
+          <a:lstStyle/>
+          <a:p>
+            <a:pPr algn="ctr"/>
+            <a:r>
+              <a:rPr sz="4800" b="1" i="0">
+                <a:solidFill>
+                  <a:srgbClr val="FFFFFF"/>
+                </a:solidFill>
+                <a:latin typeface="Arial"/>
+              </a:rPr>
+              <a:t>Grande é Tua fidelidade</a:t>
+            </a:r>
+          </a:p>
+        </p:txBody>
+      </p:sp>
+    </p:spTree>
+  </p:cSld>
+  <p:clrMapOvr>
+    <a:masterClrMapping/>
+  </p:clrMapOvr>
+</p:sld>
+</file>
+
+<file path=ppt/slides/slide28.xml><?xml version="1.0" encoding="utf-8"?>
+<p:sld xmlns:a="http://schemas.openxmlformats.org/drawingml/2006/main" xmlns:p="http://schemas.openxmlformats.org/presentationml/2006/main" xmlns:r="http://schemas.openxmlformats.org/officeDocument/2006/relationships">
+  <p:cSld>
+    <p:bg>
+      <p:bgPr>
+        <a:solidFill>
+          <a:srgbClr val="000000"/>
+        </a:solidFill>
+        <a:effectLst/>
+      </p:bgPr>
+    </p:bg>
+    <p:spTree>
+      <p:nvGrpSpPr>
+        <p:cNvPr id="1" name=""/>
+        <p:cNvGrpSpPr/>
+        <p:nvPr/>
+      </p:nvGrpSpPr>
+      <p:grpSpPr/>
+      <p:sp>
+        <p:nvSpPr>
+          <p:cNvPr id="2" name="TextBox 1"/>
+          <p:cNvSpPr txBox="1"/>
+          <p:nvPr/>
+        </p:nvSpPr>
+        <p:spPr>
+          <a:xfrm>
+            <a:off x="640080" y="2052828"/>
+            <a:ext cx="10911535" cy="731520"/>
+          </a:xfrm>
+          <a:prstGeom prst="rect">
+            <a:avLst/>
+          </a:prstGeom>
+          <a:noFill/>
+        </p:spPr>
+        <p:txBody>
+          <a:bodyPr wrap="square">
+            <a:spAutoFit/>
+          </a:bodyPr>
+          <a:lstStyle/>
+          <a:p>
+            <a:pPr algn="ctr"/>
+            <a:r>
+              <a:rPr sz="3400" b="1" i="0">
+                <a:solidFill>
+                  <a:srgbClr val="FFFFFF"/>
+                </a:solidFill>
+                <a:latin typeface="Arial"/>
+              </a:rPr>
+              <a:t>Manhã após manhã novas misericórdias encontro</a:t>
+            </a:r>
+          </a:p>
+        </p:txBody>
+      </p:sp>
+      <p:sp>
+        <p:nvSpPr>
+          <p:cNvPr id="3" name="TextBox 2"/>
+          <p:cNvSpPr txBox="1"/>
+          <p:nvPr/>
+        </p:nvSpPr>
+        <p:spPr>
+          <a:xfrm>
+            <a:off x="640080" y="2985516"/>
+            <a:ext cx="10911535" cy="731520"/>
+          </a:xfrm>
+          <a:prstGeom prst="rect">
+            <a:avLst/>
+          </a:prstGeom>
+          <a:noFill/>
+        </p:spPr>
+        <p:txBody>
+          <a:bodyPr wrap="square">
+            <a:spAutoFit/>
+          </a:bodyPr>
+          <a:lstStyle/>
+          <a:p>
+            <a:pPr algn="ctr"/>
+            <a:r>
+              <a:rPr sz="4100" b="1" i="0">
+                <a:solidFill>
+                  <a:srgbClr val="FFFFFF"/>
+                </a:solidFill>
+                <a:latin typeface="Arial"/>
+              </a:rPr>
+              <a:t>Tudo que preciso Tua mão sempre provê</a:t>
+            </a:r>
+          </a:p>
+        </p:txBody>
+      </p:sp>
+    </p:spTree>
+  </p:cSld>
+  <p:clrMapOvr>
+    <a:masterClrMapping/>
+  </p:clrMapOvr>
+</p:sld>
+</file>
+
+<file path=ppt/slides/slide29.xml><?xml version="1.0" encoding="utf-8"?>
+<p:sld xmlns:a="http://schemas.openxmlformats.org/drawingml/2006/main" xmlns:p="http://schemas.openxmlformats.org/presentationml/2006/main" xmlns:r="http://schemas.openxmlformats.org/officeDocument/2006/relationships">
+  <p:cSld>
+    <p:bg>
+      <p:bgPr>
+        <a:solidFill>
+          <a:srgbClr val="000000"/>
+        </a:solidFill>
+        <a:effectLst/>
+      </p:bgPr>
+    </p:bg>
+    <p:spTree>
+      <p:nvGrpSpPr>
+        <p:cNvPr id="1" name=""/>
+        <p:cNvGrpSpPr/>
+        <p:nvPr/>
+      </p:nvGrpSpPr>
+      <p:grpSpPr/>
+      <p:sp>
+        <p:nvSpPr>
+          <p:cNvPr id="2" name="TextBox 1"/>
+          <p:cNvSpPr txBox="1"/>
+          <p:nvPr/>
+        </p:nvSpPr>
+        <p:spPr>
+          <a:xfrm>
+            <a:off x="640080" y="2052828"/>
+            <a:ext cx="10911535" cy="731520"/>
+          </a:xfrm>
+          <a:prstGeom prst="rect">
+            <a:avLst/>
+          </a:prstGeom>
+          <a:noFill/>
+        </p:spPr>
+        <p:txBody>
+          <a:bodyPr wrap="square">
+            <a:spAutoFit/>
+          </a:bodyPr>
+          <a:lstStyle/>
+          <a:p>
+            <a:pPr algn="ctr"/>
+            <a:r>
+              <a:rPr sz="4800" b="1" i="0">
+                <a:solidFill>
+                  <a:srgbClr val="FFFFFF"/>
+                </a:solidFill>
+                <a:latin typeface="Arial"/>
+              </a:rPr>
+              <a:t>Grande é Tua fidelidade, Senhor</a:t>
+            </a:r>
+          </a:p>
+        </p:txBody>
+      </p:sp>
+      <p:sp>
+        <p:nvSpPr>
+          <p:cNvPr id="3" name="TextBox 2"/>
+          <p:cNvSpPr txBox="1"/>
+          <p:nvPr/>
+        </p:nvSpPr>
+        <p:spPr>
+          <a:xfrm>
+            <a:off x="640080" y="2985516"/>
+            <a:ext cx="10911535" cy="731520"/>
+          </a:xfrm>
+          <a:prstGeom prst="rect">
+            <a:avLst/>
+          </a:prstGeom>
+          <a:noFill/>
+        </p:spPr>
+        <p:txBody>
+          <a:bodyPr wrap="square">
+            <a:spAutoFit/>
+          </a:bodyPr>
+          <a:lstStyle/>
+          <a:p>
+            <a:pPr algn="ctr"/>
+            <a:r>
+              <a:rPr sz="4800" b="1" i="0">
+                <a:solidFill>
+                  <a:srgbClr val="FFFFFF"/>
+                </a:solidFill>
+                <a:latin typeface="Arial"/>
+              </a:rPr>
+              <a:t>Grande é Tua fidelidade</a:t>
             </a:r>
           </a:p>
         </p:txBody>
@@ -6132,23 +6435,23 @@
         </p:nvSpPr>
         <p:spPr>
           <a:xfrm>
-            <a:off x="594360" y="2258568"/>
-            <a:ext cx="11002975" cy="685800"/>
-          </a:xfrm>
-          <a:prstGeom prst="rect">
-            <a:avLst/>
-          </a:prstGeom>
-          <a:noFill/>
-        </p:spPr>
-        <p:txBody>
-          <a:bodyPr wrap="square">
-            <a:spAutoFit/>
-          </a:bodyPr>
-          <a:lstStyle/>
-          <a:p>
-            <a:pPr algn="ctr"/>
-            <a:r>
-              <a:rPr sz="4400" b="1" i="0">
+            <a:off x="640080" y="2052828"/>
+            <a:ext cx="10911535" cy="731520"/>
+          </a:xfrm>
+          <a:prstGeom prst="rect">
+            <a:avLst/>
+          </a:prstGeom>
+          <a:noFill/>
+        </p:spPr>
+        <p:txBody>
+          <a:bodyPr wrap="square">
+            <a:spAutoFit/>
+          </a:bodyPr>
+          <a:lstStyle/>
+          <a:p>
+            <a:pPr algn="ctr"/>
+            <a:r>
+              <a:rPr sz="4800" b="1" i="0">
                 <a:solidFill>
                   <a:srgbClr val="FFFFFF"/>
                 </a:solidFill>
@@ -6167,29 +6470,29 @@
         </p:nvSpPr>
         <p:spPr>
           <a:xfrm>
-            <a:off x="594360" y="2980944"/>
-            <a:ext cx="11002975" cy="347472"/>
-          </a:xfrm>
-          <a:prstGeom prst="rect">
-            <a:avLst/>
-          </a:prstGeom>
-          <a:noFill/>
-        </p:spPr>
-        <p:txBody>
-          <a:bodyPr wrap="square">
-            <a:spAutoFit/>
-          </a:bodyPr>
-          <a:lstStyle/>
-          <a:p>
-            <a:pPr algn="ctr"/>
-            <a:r>
-              <a:rPr sz="2200" b="0" i="1">
-                <a:solidFill>
-                  <a:srgbClr val="8C8C8C"/>
-                </a:solidFill>
-                <a:latin typeface="Arial"/>
-              </a:rPr>
-              <a:t/>
+            <a:off x="640080" y="2985516"/>
+            <a:ext cx="10911535" cy="731520"/>
+          </a:xfrm>
+          <a:prstGeom prst="rect">
+            <a:avLst/>
+          </a:prstGeom>
+          <a:noFill/>
+        </p:spPr>
+        <p:txBody>
+          <a:bodyPr wrap="square">
+            <a:spAutoFit/>
+          </a:bodyPr>
+          <a:lstStyle/>
+          <a:p>
+            <a:pPr algn="ctr"/>
+            <a:r>
+              <a:rPr sz="3900" b="1" i="0">
+                <a:solidFill>
+                  <a:srgbClr val="FFFFFF"/>
+                </a:solidFill>
+                <a:latin typeface="Arial"/>
+              </a:rPr>
+              <a:t>Grande é Tua fidelidade, ó Deus meu Pai</a:t>
             </a:r>
           </a:p>
         </p:txBody>
@@ -6202,64 +6505,125 @@
         </p:nvSpPr>
         <p:spPr>
           <a:xfrm>
-            <a:off x="594360" y="3529584"/>
-            <a:ext cx="11002975" cy="685800"/>
-          </a:xfrm>
-          <a:prstGeom prst="rect">
-            <a:avLst/>
-          </a:prstGeom>
-          <a:noFill/>
-        </p:spPr>
-        <p:txBody>
-          <a:bodyPr wrap="square">
-            <a:spAutoFit/>
-          </a:bodyPr>
-          <a:lstStyle/>
-          <a:p>
-            <a:pPr algn="ctr"/>
-            <a:r>
-              <a:rPr sz="3610" b="1" i="0">
+            <a:off x="640080" y="4128516"/>
+            <a:ext cx="10911535" cy="310896"/>
+          </a:xfrm>
+          <a:prstGeom prst="rect">
+            <a:avLst/>
+          </a:prstGeom>
+          <a:noFill/>
+        </p:spPr>
+        <p:txBody>
+          <a:bodyPr wrap="square">
+            <a:spAutoFit/>
+          </a:bodyPr>
+          <a:lstStyle/>
+          <a:p>
+            <a:pPr algn="ctr"/>
+            <a:r>
+              <a:rPr sz="2000" b="0" i="0">
+                <a:solidFill>
+                  <a:srgbClr val="828282"/>
+                </a:solidFill>
+                <a:latin typeface="Arial"/>
+              </a:rPr>
+              <a:t>父の神の真 実は</a:t>
+            </a:r>
+          </a:p>
+        </p:txBody>
+      </p:sp>
+      <p:sp>
+        <p:nvSpPr>
+          <p:cNvPr id="5" name="TextBox 4"/>
+          <p:cNvSpPr txBox="1"/>
+          <p:nvPr/>
+        </p:nvSpPr>
+        <p:spPr>
+          <a:xfrm>
+            <a:off x="640080" y="4494276"/>
+            <a:ext cx="10911535" cy="310896"/>
+          </a:xfrm>
+          <a:prstGeom prst="rect">
+            <a:avLst/>
+          </a:prstGeom>
+          <a:noFill/>
+        </p:spPr>
+        <p:txBody>
+          <a:bodyPr wrap="square">
+            <a:spAutoFit/>
+          </a:bodyPr>
+          <a:lstStyle/>
+          <a:p>
+            <a:pPr algn="ctr"/>
+            <a:r>
+              <a:rPr sz="2000" b="0" i="0">
+                <a:solidFill>
+                  <a:srgbClr val="828282"/>
+                </a:solidFill>
+                <a:latin typeface="Arial"/>
+              </a:rPr>
+              <a:t>とこしえまで変わらず</a:t>
+            </a:r>
+          </a:p>
+        </p:txBody>
+      </p:sp>
+    </p:spTree>
+  </p:cSld>
+  <p:clrMapOvr>
+    <a:masterClrMapping/>
+  </p:clrMapOvr>
+</p:sld>
+</file>
+
+<file path=ppt/slides/slide30.xml><?xml version="1.0" encoding="utf-8"?>
+<p:sld xmlns:a="http://schemas.openxmlformats.org/drawingml/2006/main" xmlns:p="http://schemas.openxmlformats.org/presentationml/2006/main" xmlns:r="http://schemas.openxmlformats.org/officeDocument/2006/relationships">
+  <p:cSld>
+    <p:bg>
+      <p:bgPr>
+        <a:solidFill>
+          <a:srgbClr val="000000"/>
+        </a:solidFill>
+        <a:effectLst/>
+      </p:bgPr>
+    </p:bg>
+    <p:spTree>
+      <p:nvGrpSpPr>
+        <p:cNvPr id="1" name=""/>
+        <p:cNvGrpSpPr/>
+        <p:nvPr/>
+      </p:nvGrpSpPr>
+      <p:grpSpPr/>
+      <p:sp>
+        <p:nvSpPr>
+          <p:cNvPr id="2" name="TextBox 1"/>
+          <p:cNvSpPr txBox="1"/>
+          <p:nvPr/>
+        </p:nvSpPr>
+        <p:spPr>
+          <a:xfrm>
+            <a:off x="640080" y="2702052"/>
+            <a:ext cx="10911535" cy="731520"/>
+          </a:xfrm>
+          <a:prstGeom prst="rect">
+            <a:avLst/>
+          </a:prstGeom>
+          <a:noFill/>
+        </p:spPr>
+        <p:txBody>
+          <a:bodyPr wrap="square">
+            <a:spAutoFit/>
+          </a:bodyPr>
+          <a:lstStyle/>
+          <a:p>
+            <a:pPr algn="ctr"/>
+            <a:r>
+              <a:rPr sz="3600" b="1" i="0">
                 <a:solidFill>
                   <a:srgbClr val="FFFFFF"/>
                 </a:solidFill>
                 <a:latin typeface="Arial"/>
               </a:rPr>
-              <a:t>Grande é Tua fidelidade, ó Deus meu Pai</a:t>
-            </a:r>
-          </a:p>
-        </p:txBody>
-      </p:sp>
-      <p:sp>
-        <p:nvSpPr>
-          <p:cNvPr id="5" name="TextBox 4"/>
-          <p:cNvSpPr txBox="1"/>
-          <p:nvPr/>
-        </p:nvSpPr>
-        <p:spPr>
-          <a:xfrm>
-            <a:off x="594360" y="4251960"/>
-            <a:ext cx="11002975" cy="347472"/>
-          </a:xfrm>
-          <a:prstGeom prst="rect">
-            <a:avLst/>
-          </a:prstGeom>
-          <a:noFill/>
-        </p:spPr>
-        <p:txBody>
-          <a:bodyPr wrap="square">
-            <a:spAutoFit/>
-          </a:bodyPr>
-          <a:lstStyle/>
-          <a:p>
-            <a:pPr algn="ctr"/>
-            <a:r>
-              <a:rPr sz="2200" b="0" i="1">
-                <a:solidFill>
-                  <a:srgbClr val="8C8C8C"/>
-                </a:solidFill>
-                <a:latin typeface="Arial"/>
-              </a:rPr>
-              <a:t/>
+              <a:t>Perdão para o pecado e uma paz que perdura</a:t>
             </a:r>
           </a:p>
         </p:txBody>
@@ -6298,23 +6662,23 @@
         </p:nvSpPr>
         <p:spPr>
           <a:xfrm>
-            <a:off x="594360" y="2258568"/>
-            <a:ext cx="11002975" cy="685800"/>
-          </a:xfrm>
-          <a:prstGeom prst="rect">
-            <a:avLst/>
-          </a:prstGeom>
-          <a:noFill/>
-        </p:spPr>
-        <p:txBody>
-          <a:bodyPr wrap="square">
-            <a:spAutoFit/>
-          </a:bodyPr>
-          <a:lstStyle/>
-          <a:p>
-            <a:pPr algn="ctr"/>
-            <a:r>
-              <a:rPr sz="4400" b="1" i="0">
+            <a:off x="640080" y="2052828"/>
+            <a:ext cx="10911535" cy="731520"/>
+          </a:xfrm>
+          <a:prstGeom prst="rect">
+            <a:avLst/>
+          </a:prstGeom>
+          <a:noFill/>
+        </p:spPr>
+        <p:txBody>
+          <a:bodyPr wrap="square">
+            <a:spAutoFit/>
+          </a:bodyPr>
+          <a:lstStyle/>
+          <a:p>
+            <a:pPr algn="ctr"/>
+            <a:r>
+              <a:rPr sz="4800" b="1" i="0">
                 <a:solidFill>
                   <a:srgbClr val="FFFFFF"/>
                 </a:solidFill>
@@ -6333,29 +6697,29 @@
         </p:nvSpPr>
         <p:spPr>
           <a:xfrm>
-            <a:off x="594360" y="2980944"/>
-            <a:ext cx="11002975" cy="347472"/>
-          </a:xfrm>
-          <a:prstGeom prst="rect">
-            <a:avLst/>
-          </a:prstGeom>
-          <a:noFill/>
-        </p:spPr>
-        <p:txBody>
-          <a:bodyPr wrap="square">
-            <a:spAutoFit/>
-          </a:bodyPr>
-          <a:lstStyle/>
-          <a:p>
-            <a:pPr algn="ctr"/>
-            <a:r>
-              <a:rPr sz="2200" b="0" i="1">
-                <a:solidFill>
-                  <a:srgbClr val="8C8C8C"/>
-                </a:solidFill>
-                <a:latin typeface="Arial"/>
-              </a:rPr>
-              <a:t/>
+            <a:off x="640080" y="2985516"/>
+            <a:ext cx="10911535" cy="731520"/>
+          </a:xfrm>
+          <a:prstGeom prst="rect">
+            <a:avLst/>
+          </a:prstGeom>
+          <a:noFill/>
+        </p:spPr>
+        <p:txBody>
+          <a:bodyPr wrap="square">
+            <a:spAutoFit/>
+          </a:bodyPr>
+          <a:lstStyle/>
+          <a:p>
+            <a:pPr algn="ctr"/>
+            <a:r>
+              <a:rPr sz="4600" b="1" i="0">
+                <a:solidFill>
+                  <a:srgbClr val="FFFFFF"/>
+                </a:solidFill>
+                <a:latin typeface="Arial"/>
+              </a:rPr>
+              <a:t>Não me abandonas; como prometeste</a:t>
             </a:r>
           </a:p>
         </p:txBody>
@@ -6368,29 +6732,29 @@
         </p:nvSpPr>
         <p:spPr>
           <a:xfrm>
-            <a:off x="594360" y="3529584"/>
-            <a:ext cx="11002975" cy="685800"/>
-          </a:xfrm>
-          <a:prstGeom prst="rect">
-            <a:avLst/>
-          </a:prstGeom>
-          <a:noFill/>
-        </p:spPr>
-        <p:txBody>
-          <a:bodyPr wrap="square">
-            <a:spAutoFit/>
-          </a:bodyPr>
-          <a:lstStyle/>
-          <a:p>
-            <a:pPr algn="ctr"/>
-            <a:r>
-              <a:rPr sz="4266" b="1" i="0">
-                <a:solidFill>
-                  <a:srgbClr val="FFFFFF"/>
-                </a:solidFill>
-                <a:latin typeface="Arial"/>
-              </a:rPr>
-              <a:t>Não me abandonas; como prometeste</a:t>
+            <a:off x="640080" y="4128516"/>
+            <a:ext cx="10911535" cy="310896"/>
+          </a:xfrm>
+          <a:prstGeom prst="rect">
+            <a:avLst/>
+          </a:prstGeom>
+          <a:noFill/>
+        </p:spPr>
+        <p:txBody>
+          <a:bodyPr wrap="square">
+            <a:spAutoFit/>
+          </a:bodyPr>
+          <a:lstStyle/>
+          <a:p>
+            <a:pPr algn="ctr"/>
+            <a:r>
+              <a:rPr sz="2000" b="0" i="0">
+                <a:solidFill>
+                  <a:srgbClr val="828282"/>
+                </a:solidFill>
+                <a:latin typeface="Arial"/>
+              </a:rPr>
+              <a:t>慈しみと憐れみは</a:t>
             </a:r>
           </a:p>
         </p:txBody>
@@ -6403,29 +6767,29 @@
         </p:nvSpPr>
         <p:spPr>
           <a:xfrm>
-            <a:off x="594360" y="4251960"/>
-            <a:ext cx="11002975" cy="347472"/>
-          </a:xfrm>
-          <a:prstGeom prst="rect">
-            <a:avLst/>
-          </a:prstGeom>
-          <a:noFill/>
-        </p:spPr>
-        <p:txBody>
-          <a:bodyPr wrap="square">
-            <a:spAutoFit/>
-          </a:bodyPr>
-          <a:lstStyle/>
-          <a:p>
-            <a:pPr algn="ctr"/>
-            <a:r>
-              <a:rPr sz="2200" b="0" i="1">
-                <a:solidFill>
-                  <a:srgbClr val="8C8C8C"/>
-                </a:solidFill>
-                <a:latin typeface="Arial"/>
-              </a:rPr>
-              <a:t/>
+            <a:off x="640080" y="4494276"/>
+            <a:ext cx="10911535" cy="310896"/>
+          </a:xfrm>
+          <a:prstGeom prst="rect">
+            <a:avLst/>
+          </a:prstGeom>
+          <a:noFill/>
+        </p:spPr>
+        <p:txBody>
+          <a:bodyPr wrap="square">
+            <a:spAutoFit/>
+          </a:bodyPr>
+          <a:lstStyle/>
+          <a:p>
+            <a:pPr algn="ctr"/>
+            <a:r>
+              <a:rPr sz="2000" b="0" i="0">
+                <a:solidFill>
+                  <a:srgbClr val="828282"/>
+                </a:solidFill>
+                <a:latin typeface="Arial"/>
+              </a:rPr>
+              <a:t>尽きることがありません</a:t>
             </a:r>
           </a:p>
         </p:txBody>
@@ -6464,64 +6828,29 @@
         </p:nvSpPr>
         <p:spPr>
           <a:xfrm>
-            <a:off x="594360" y="2894076"/>
-            <a:ext cx="11002975" cy="685800"/>
-          </a:xfrm>
-          <a:prstGeom prst="rect">
-            <a:avLst/>
-          </a:prstGeom>
-          <a:noFill/>
-        </p:spPr>
-        <p:txBody>
-          <a:bodyPr wrap="square">
-            <a:spAutoFit/>
-          </a:bodyPr>
-          <a:lstStyle/>
-          <a:p>
-            <a:pPr algn="ctr"/>
-            <a:r>
-              <a:rPr sz="4400" b="1" i="0">
+            <a:off x="640080" y="2702052"/>
+            <a:ext cx="10911535" cy="731520"/>
+          </a:xfrm>
+          <a:prstGeom prst="rect">
+            <a:avLst/>
+          </a:prstGeom>
+          <a:noFill/>
+        </p:spPr>
+        <p:txBody>
+          <a:bodyPr wrap="square">
+            <a:spAutoFit/>
+          </a:bodyPr>
+          <a:lstStyle/>
+          <a:p>
+            <a:pPr algn="ctr"/>
+            <a:r>
+              <a:rPr sz="4800" b="1" i="0">
                 <a:solidFill>
                   <a:srgbClr val="FFFFFF"/>
                 </a:solidFill>
                 <a:latin typeface="Arial"/>
               </a:rPr>
               <a:t>Tua fidelidade nunca falhará</a:t>
-            </a:r>
-          </a:p>
-        </p:txBody>
-      </p:sp>
-      <p:sp>
-        <p:nvSpPr>
-          <p:cNvPr id="3" name="TextBox 2"/>
-          <p:cNvSpPr txBox="1"/>
-          <p:nvPr/>
-        </p:nvSpPr>
-        <p:spPr>
-          <a:xfrm>
-            <a:off x="594360" y="3616452"/>
-            <a:ext cx="11002975" cy="347472"/>
-          </a:xfrm>
-          <a:prstGeom prst="rect">
-            <a:avLst/>
-          </a:prstGeom>
-          <a:noFill/>
-        </p:spPr>
-        <p:txBody>
-          <a:bodyPr wrap="square">
-            <a:spAutoFit/>
-          </a:bodyPr>
-          <a:lstStyle/>
-          <a:p>
-            <a:pPr algn="ctr"/>
-            <a:r>
-              <a:rPr sz="2200" b="0" i="1">
-                <a:solidFill>
-                  <a:srgbClr val="8C8C8C"/>
-                </a:solidFill>
-                <a:latin typeface="Arial"/>
-              </a:rPr>
-              <a:t/>
             </a:r>
           </a:p>
         </p:txBody>
@@ -6560,23 +6889,23 @@
         </p:nvSpPr>
         <p:spPr>
           <a:xfrm>
-            <a:off x="594360" y="2258568"/>
-            <a:ext cx="11002975" cy="685800"/>
-          </a:xfrm>
-          <a:prstGeom prst="rect">
-            <a:avLst/>
-          </a:prstGeom>
-          <a:noFill/>
-        </p:spPr>
-        <p:txBody>
-          <a:bodyPr wrap="square">
-            <a:spAutoFit/>
-          </a:bodyPr>
-          <a:lstStyle/>
-          <a:p>
-            <a:pPr algn="ctr"/>
-            <a:r>
-              <a:rPr sz="4400" b="1" i="0">
+            <a:off x="640080" y="2052828"/>
+            <a:ext cx="10911535" cy="731520"/>
+          </a:xfrm>
+          <a:prstGeom prst="rect">
+            <a:avLst/>
+          </a:prstGeom>
+          <a:noFill/>
+        </p:spPr>
+        <p:txBody>
+          <a:bodyPr wrap="square">
+            <a:spAutoFit/>
+          </a:bodyPr>
+          <a:lstStyle/>
+          <a:p>
+            <a:pPr algn="ctr"/>
+            <a:r>
+              <a:rPr sz="4800" b="1" i="0">
                 <a:solidFill>
                   <a:srgbClr val="FFFFFF"/>
                 </a:solidFill>
@@ -6595,29 +6924,29 @@
         </p:nvSpPr>
         <p:spPr>
           <a:xfrm>
-            <a:off x="594360" y="2980944"/>
-            <a:ext cx="11002975" cy="347472"/>
-          </a:xfrm>
-          <a:prstGeom prst="rect">
-            <a:avLst/>
-          </a:prstGeom>
-          <a:noFill/>
-        </p:spPr>
-        <p:txBody>
-          <a:bodyPr wrap="square">
-            <a:spAutoFit/>
-          </a:bodyPr>
-          <a:lstStyle/>
-          <a:p>
-            <a:pPr algn="ctr"/>
-            <a:r>
-              <a:rPr sz="2200" b="0" i="1">
-                <a:solidFill>
-                  <a:srgbClr val="8C8C8C"/>
-                </a:solidFill>
-                <a:latin typeface="Arial"/>
-              </a:rPr>
-              <a:t/>
+            <a:off x="640080" y="2985516"/>
+            <a:ext cx="10911535" cy="731520"/>
+          </a:xfrm>
+          <a:prstGeom prst="rect">
+            <a:avLst/>
+          </a:prstGeom>
+          <a:noFill/>
+        </p:spPr>
+        <p:txBody>
+          <a:bodyPr wrap="square">
+            <a:spAutoFit/>
+          </a:bodyPr>
+          <a:lstStyle/>
+          <a:p>
+            <a:pPr algn="ctr"/>
+            <a:r>
+              <a:rPr sz="4800" b="1" i="0">
+                <a:solidFill>
+                  <a:srgbClr val="FFFFFF"/>
+                </a:solidFill>
+                <a:latin typeface="Arial"/>
+              </a:rPr>
+              <a:t>Grande é Tua fidelidade</a:t>
             </a:r>
           </a:p>
         </p:txBody>
@@ -6630,29 +6959,29 @@
         </p:nvSpPr>
         <p:spPr>
           <a:xfrm>
-            <a:off x="594360" y="3529584"/>
-            <a:ext cx="11002975" cy="685800"/>
-          </a:xfrm>
-          <a:prstGeom prst="rect">
-            <a:avLst/>
-          </a:prstGeom>
-          <a:noFill/>
-        </p:spPr>
-        <p:txBody>
-          <a:bodyPr wrap="square">
-            <a:spAutoFit/>
-          </a:bodyPr>
-          <a:lstStyle/>
-          <a:p>
-            <a:pPr algn="ctr"/>
-            <a:r>
-              <a:rPr sz="4400" b="1" i="0">
-                <a:solidFill>
-                  <a:srgbClr val="FFFFFF"/>
-                </a:solidFill>
-                <a:latin typeface="Arial"/>
-              </a:rPr>
-              <a:t>Grande é Tua fidelidade</a:t>
+            <a:off x="640080" y="4128516"/>
+            <a:ext cx="10911535" cy="310896"/>
+          </a:xfrm>
+          <a:prstGeom prst="rect">
+            <a:avLst/>
+          </a:prstGeom>
+          <a:noFill/>
+        </p:spPr>
+        <p:txBody>
+          <a:bodyPr wrap="square">
+            <a:spAutoFit/>
+          </a:bodyPr>
+          <a:lstStyle/>
+          <a:p>
+            <a:pPr algn="ctr"/>
+            <a:r>
+              <a:rPr sz="2000" b="0" i="0">
+                <a:solidFill>
+                  <a:srgbClr val="828282"/>
+                </a:solidFill>
+                <a:latin typeface="Arial"/>
+              </a:rPr>
+              <a:t>すばらしい主　その真実は</a:t>
             </a:r>
           </a:p>
         </p:txBody>
@@ -6665,29 +6994,29 @@
         </p:nvSpPr>
         <p:spPr>
           <a:xfrm>
-            <a:off x="594360" y="4251960"/>
-            <a:ext cx="11002975" cy="347472"/>
-          </a:xfrm>
-          <a:prstGeom prst="rect">
-            <a:avLst/>
-          </a:prstGeom>
-          <a:noFill/>
-        </p:spPr>
-        <p:txBody>
-          <a:bodyPr wrap="square">
-            <a:spAutoFit/>
-          </a:bodyPr>
-          <a:lstStyle/>
-          <a:p>
-            <a:pPr algn="ctr"/>
-            <a:r>
-              <a:rPr sz="2200" b="0" i="1">
-                <a:solidFill>
-                  <a:srgbClr val="8C8C8C"/>
-                </a:solidFill>
-                <a:latin typeface="Arial"/>
-              </a:rPr>
-              <a:t/>
+            <a:off x="640080" y="4494276"/>
+            <a:ext cx="10911535" cy="310896"/>
+          </a:xfrm>
+          <a:prstGeom prst="rect">
+            <a:avLst/>
+          </a:prstGeom>
+          <a:noFill/>
+        </p:spPr>
+        <p:txBody>
+          <a:bodyPr wrap="square">
+            <a:spAutoFit/>
+          </a:bodyPr>
+          <a:lstStyle/>
+          <a:p>
+            <a:pPr algn="ctr"/>
+            <a:r>
+              <a:rPr sz="2000" b="0" i="0">
+                <a:solidFill>
+                  <a:srgbClr val="828282"/>
+                </a:solidFill>
+                <a:latin typeface="Arial"/>
+              </a:rPr>
+              <a:t>朝毎にあたらしく</a:t>
             </a:r>
           </a:p>
         </p:txBody>
@@ -6726,23 +7055,23 @@
         </p:nvSpPr>
         <p:spPr>
           <a:xfrm>
-            <a:off x="594360" y="2258568"/>
-            <a:ext cx="11002975" cy="685800"/>
-          </a:xfrm>
-          <a:prstGeom prst="rect">
-            <a:avLst/>
-          </a:prstGeom>
-          <a:noFill/>
-        </p:spPr>
-        <p:txBody>
-          <a:bodyPr wrap="square">
-            <a:spAutoFit/>
-          </a:bodyPr>
-          <a:lstStyle/>
-          <a:p>
-            <a:pPr algn="ctr"/>
-            <a:r>
-              <a:rPr sz="3128" b="1" i="0">
+            <a:off x="640080" y="2052828"/>
+            <a:ext cx="10911535" cy="731520"/>
+          </a:xfrm>
+          <a:prstGeom prst="rect">
+            <a:avLst/>
+          </a:prstGeom>
+          <a:noFill/>
+        </p:spPr>
+        <p:txBody>
+          <a:bodyPr wrap="square">
+            <a:spAutoFit/>
+          </a:bodyPr>
+          <a:lstStyle/>
+          <a:p>
+            <a:pPr algn="ctr"/>
+            <a:r>
+              <a:rPr sz="3400" b="1" i="0">
                 <a:solidFill>
                   <a:srgbClr val="FFFFFF"/>
                 </a:solidFill>
@@ -6761,29 +7090,29 @@
         </p:nvSpPr>
         <p:spPr>
           <a:xfrm>
-            <a:off x="594360" y="2980944"/>
-            <a:ext cx="11002975" cy="347472"/>
-          </a:xfrm>
-          <a:prstGeom prst="rect">
-            <a:avLst/>
-          </a:prstGeom>
-          <a:noFill/>
-        </p:spPr>
-        <p:txBody>
-          <a:bodyPr wrap="square">
-            <a:spAutoFit/>
-          </a:bodyPr>
-          <a:lstStyle/>
-          <a:p>
-            <a:pPr algn="ctr"/>
-            <a:r>
-              <a:rPr sz="2200" b="0" i="1">
-                <a:solidFill>
-                  <a:srgbClr val="8C8C8C"/>
-                </a:solidFill>
-                <a:latin typeface="Arial"/>
-              </a:rPr>
-              <a:t/>
+            <a:off x="640080" y="2985516"/>
+            <a:ext cx="10911535" cy="731520"/>
+          </a:xfrm>
+          <a:prstGeom prst="rect">
+            <a:avLst/>
+          </a:prstGeom>
+          <a:noFill/>
+        </p:spPr>
+        <p:txBody>
+          <a:bodyPr wrap="square">
+            <a:spAutoFit/>
+          </a:bodyPr>
+          <a:lstStyle/>
+          <a:p>
+            <a:pPr algn="ctr"/>
+            <a:r>
+              <a:rPr sz="4100" b="1" i="0">
+                <a:solidFill>
+                  <a:srgbClr val="FFFFFF"/>
+                </a:solidFill>
+                <a:latin typeface="Arial"/>
+              </a:rPr>
+              <a:t>Tudo que preciso Tua mão sempre provê</a:t>
             </a:r>
           </a:p>
         </p:txBody>
@@ -6796,29 +7125,29 @@
         </p:nvSpPr>
         <p:spPr>
           <a:xfrm>
-            <a:off x="594360" y="3529584"/>
-            <a:ext cx="11002975" cy="685800"/>
-          </a:xfrm>
-          <a:prstGeom prst="rect">
-            <a:avLst/>
-          </a:prstGeom>
-          <a:noFill/>
-        </p:spPr>
-        <p:txBody>
-          <a:bodyPr wrap="square">
-            <a:spAutoFit/>
-          </a:bodyPr>
-          <a:lstStyle/>
-          <a:p>
-            <a:pPr algn="ctr"/>
-            <a:r>
-              <a:rPr sz="3805" b="1" i="0">
-                <a:solidFill>
-                  <a:srgbClr val="FFFFFF"/>
-                </a:solidFill>
-                <a:latin typeface="Arial"/>
-              </a:rPr>
-              <a:t>Tudo que preciso Tua mão sempre provê</a:t>
+            <a:off x="640080" y="4128516"/>
+            <a:ext cx="10911535" cy="310896"/>
+          </a:xfrm>
+          <a:prstGeom prst="rect">
+            <a:avLst/>
+          </a:prstGeom>
+          <a:noFill/>
+        </p:spPr>
+        <p:txBody>
+          <a:bodyPr wrap="square">
+            <a:spAutoFit/>
+          </a:bodyPr>
+          <a:lstStyle/>
+          <a:p>
+            <a:pPr algn="ctr"/>
+            <a:r>
+              <a:rPr sz="2000" b="0" i="0">
+                <a:solidFill>
+                  <a:srgbClr val="828282"/>
+                </a:solidFill>
+                <a:latin typeface="Arial"/>
+              </a:rPr>
+              <a:t>深い恵み知らされて</a:t>
             </a:r>
           </a:p>
         </p:txBody>
@@ -6831,29 +7160,29 @@
         </p:nvSpPr>
         <p:spPr>
           <a:xfrm>
-            <a:off x="594360" y="4251960"/>
-            <a:ext cx="11002975" cy="347472"/>
-          </a:xfrm>
-          <a:prstGeom prst="rect">
-            <a:avLst/>
-          </a:prstGeom>
-          <a:noFill/>
-        </p:spPr>
-        <p:txBody>
-          <a:bodyPr wrap="square">
-            <a:spAutoFit/>
-          </a:bodyPr>
-          <a:lstStyle/>
-          <a:p>
-            <a:pPr algn="ctr"/>
-            <a:r>
-              <a:rPr sz="2200" b="0" i="1">
-                <a:solidFill>
-                  <a:srgbClr val="8C8C8C"/>
-                </a:solidFill>
-                <a:latin typeface="Arial"/>
-              </a:rPr>
-              <a:t/>
+            <a:off x="640080" y="4494276"/>
+            <a:ext cx="10911535" cy="310896"/>
+          </a:xfrm>
+          <a:prstGeom prst="rect">
+            <a:avLst/>
+          </a:prstGeom>
+          <a:noFill/>
+        </p:spPr>
+        <p:txBody>
+          <a:bodyPr wrap="square">
+            <a:spAutoFit/>
+          </a:bodyPr>
+          <a:lstStyle/>
+          <a:p>
+            <a:pPr algn="ctr"/>
+            <a:r>
+              <a:rPr sz="2000" b="0" i="0">
+                <a:solidFill>
+                  <a:srgbClr val="828282"/>
+                </a:solidFill>
+                <a:latin typeface="Arial"/>
+              </a:rPr>
+              <a:t>賛美します主の御名</a:t>
             </a:r>
           </a:p>
         </p:txBody>
@@ -6892,23 +7221,23 @@
         </p:nvSpPr>
         <p:spPr>
           <a:xfrm>
-            <a:off x="594360" y="2258568"/>
-            <a:ext cx="11002975" cy="685800"/>
-          </a:xfrm>
-          <a:prstGeom prst="rect">
-            <a:avLst/>
-          </a:prstGeom>
-          <a:noFill/>
-        </p:spPr>
-        <p:txBody>
-          <a:bodyPr wrap="square">
-            <a:spAutoFit/>
-          </a:bodyPr>
-          <a:lstStyle/>
-          <a:p>
-            <a:pPr algn="ctr"/>
-            <a:r>
-              <a:rPr sz="4400" b="1" i="0">
+            <a:off x="640080" y="2052828"/>
+            <a:ext cx="10911535" cy="731520"/>
+          </a:xfrm>
+          <a:prstGeom prst="rect">
+            <a:avLst/>
+          </a:prstGeom>
+          <a:noFill/>
+        </p:spPr>
+        <p:txBody>
+          <a:bodyPr wrap="square">
+            <a:spAutoFit/>
+          </a:bodyPr>
+          <a:lstStyle/>
+          <a:p>
+            <a:pPr algn="ctr"/>
+            <a:r>
+              <a:rPr sz="4800" b="1" i="0">
                 <a:solidFill>
                   <a:srgbClr val="FFFFFF"/>
                 </a:solidFill>
@@ -6927,99 +7256,29 @@
         </p:nvSpPr>
         <p:spPr>
           <a:xfrm>
-            <a:off x="594360" y="2980944"/>
-            <a:ext cx="11002975" cy="347472"/>
-          </a:xfrm>
-          <a:prstGeom prst="rect">
-            <a:avLst/>
-          </a:prstGeom>
-          <a:noFill/>
-        </p:spPr>
-        <p:txBody>
-          <a:bodyPr wrap="square">
-            <a:spAutoFit/>
-          </a:bodyPr>
-          <a:lstStyle/>
-          <a:p>
-            <a:pPr algn="ctr"/>
-            <a:r>
-              <a:rPr sz="2200" b="0" i="1">
-                <a:solidFill>
-                  <a:srgbClr val="8C8C8C"/>
-                </a:solidFill>
-                <a:latin typeface="Arial"/>
-              </a:rPr>
-              <a:t/>
-            </a:r>
-          </a:p>
-        </p:txBody>
-      </p:sp>
-      <p:sp>
-        <p:nvSpPr>
-          <p:cNvPr id="4" name="TextBox 3"/>
-          <p:cNvSpPr txBox="1"/>
-          <p:nvPr/>
-        </p:nvSpPr>
-        <p:spPr>
-          <a:xfrm>
-            <a:off x="594360" y="3529584"/>
-            <a:ext cx="11002975" cy="685800"/>
-          </a:xfrm>
-          <a:prstGeom prst="rect">
-            <a:avLst/>
-          </a:prstGeom>
-          <a:noFill/>
-        </p:spPr>
-        <p:txBody>
-          <a:bodyPr wrap="square">
-            <a:spAutoFit/>
-          </a:bodyPr>
-          <a:lstStyle/>
-          <a:p>
-            <a:pPr algn="ctr"/>
-            <a:r>
-              <a:rPr sz="4400" b="1" i="0">
+            <a:off x="640080" y="2985516"/>
+            <a:ext cx="10911535" cy="731520"/>
+          </a:xfrm>
+          <a:prstGeom prst="rect">
+            <a:avLst/>
+          </a:prstGeom>
+          <a:noFill/>
+        </p:spPr>
+        <p:txBody>
+          <a:bodyPr wrap="square">
+            <a:spAutoFit/>
+          </a:bodyPr>
+          <a:lstStyle/>
+          <a:p>
+            <a:pPr algn="ctr"/>
+            <a:r>
+              <a:rPr sz="4800" b="1" i="0">
                 <a:solidFill>
                   <a:srgbClr val="FFFFFF"/>
                 </a:solidFill>
                 <a:latin typeface="Arial"/>
               </a:rPr>
               <a:t>Grande é Tua fidelidade</a:t>
-            </a:r>
-          </a:p>
-        </p:txBody>
-      </p:sp>
-      <p:sp>
-        <p:nvSpPr>
-          <p:cNvPr id="5" name="TextBox 4"/>
-          <p:cNvSpPr txBox="1"/>
-          <p:nvPr/>
-        </p:nvSpPr>
-        <p:spPr>
-          <a:xfrm>
-            <a:off x="594360" y="4251960"/>
-            <a:ext cx="11002975" cy="347472"/>
-          </a:xfrm>
-          <a:prstGeom prst="rect">
-            <a:avLst/>
-          </a:prstGeom>
-          <a:noFill/>
-        </p:spPr>
-        <p:txBody>
-          <a:bodyPr wrap="square">
-            <a:spAutoFit/>
-          </a:bodyPr>
-          <a:lstStyle/>
-          <a:p>
-            <a:pPr algn="ctr"/>
-            <a:r>
-              <a:rPr sz="2200" b="0" i="1">
-                <a:solidFill>
-                  <a:srgbClr val="8C8C8C"/>
-                </a:solidFill>
-                <a:latin typeface="Arial"/>
-              </a:rPr>
-              <a:t/>
             </a:r>
           </a:p>
         </p:txBody>
@@ -7058,23 +7317,23 @@
         </p:nvSpPr>
         <p:spPr>
           <a:xfrm>
-            <a:off x="594360" y="2258568"/>
-            <a:ext cx="11002975" cy="685800"/>
-          </a:xfrm>
-          <a:prstGeom prst="rect">
-            <a:avLst/>
-          </a:prstGeom>
-          <a:noFill/>
-        </p:spPr>
-        <p:txBody>
-          <a:bodyPr wrap="square">
-            <a:spAutoFit/>
-          </a:bodyPr>
-          <a:lstStyle/>
-          <a:p>
-            <a:pPr algn="ctr"/>
-            <a:r>
-              <a:rPr sz="3128" b="1" i="0">
+            <a:off x="640080" y="2052828"/>
+            <a:ext cx="10911535" cy="731520"/>
+          </a:xfrm>
+          <a:prstGeom prst="rect">
+            <a:avLst/>
+          </a:prstGeom>
+          <a:noFill/>
+        </p:spPr>
+        <p:txBody>
+          <a:bodyPr wrap="square">
+            <a:spAutoFit/>
+          </a:bodyPr>
+          <a:lstStyle/>
+          <a:p>
+            <a:pPr algn="ctr"/>
+            <a:r>
+              <a:rPr sz="3400" b="1" i="0">
                 <a:solidFill>
                   <a:srgbClr val="FFFFFF"/>
                 </a:solidFill>
@@ -7093,99 +7352,29 @@
         </p:nvSpPr>
         <p:spPr>
           <a:xfrm>
-            <a:off x="594360" y="2980944"/>
-            <a:ext cx="11002975" cy="347472"/>
-          </a:xfrm>
-          <a:prstGeom prst="rect">
-            <a:avLst/>
-          </a:prstGeom>
-          <a:noFill/>
-        </p:spPr>
-        <p:txBody>
-          <a:bodyPr wrap="square">
-            <a:spAutoFit/>
-          </a:bodyPr>
-          <a:lstStyle/>
-          <a:p>
-            <a:pPr algn="ctr"/>
-            <a:r>
-              <a:rPr sz="2200" b="0" i="1">
-                <a:solidFill>
-                  <a:srgbClr val="8C8C8C"/>
-                </a:solidFill>
-                <a:latin typeface="Arial"/>
-              </a:rPr>
-              <a:t/>
-            </a:r>
-          </a:p>
-        </p:txBody>
-      </p:sp>
-      <p:sp>
-        <p:nvSpPr>
-          <p:cNvPr id="4" name="TextBox 3"/>
-          <p:cNvSpPr txBox="1"/>
-          <p:nvPr/>
-        </p:nvSpPr>
-        <p:spPr>
-          <a:xfrm>
-            <a:off x="594360" y="3529584"/>
-            <a:ext cx="11002975" cy="685800"/>
-          </a:xfrm>
-          <a:prstGeom prst="rect">
-            <a:avLst/>
-          </a:prstGeom>
-          <a:noFill/>
-        </p:spPr>
-        <p:txBody>
-          <a:bodyPr wrap="square">
-            <a:spAutoFit/>
-          </a:bodyPr>
-          <a:lstStyle/>
-          <a:p>
-            <a:pPr algn="ctr"/>
-            <a:r>
-              <a:rPr sz="3805" b="1" i="0">
+            <a:off x="640080" y="2985516"/>
+            <a:ext cx="10911535" cy="731520"/>
+          </a:xfrm>
+          <a:prstGeom prst="rect">
+            <a:avLst/>
+          </a:prstGeom>
+          <a:noFill/>
+        </p:spPr>
+        <p:txBody>
+          <a:bodyPr wrap="square">
+            <a:spAutoFit/>
+          </a:bodyPr>
+          <a:lstStyle/>
+          <a:p>
+            <a:pPr algn="ctr"/>
+            <a:r>
+              <a:rPr sz="4100" b="1" i="0">
                 <a:solidFill>
                   <a:srgbClr val="FFFFFF"/>
                 </a:solidFill>
                 <a:latin typeface="Arial"/>
               </a:rPr>
               <a:t>Tudo que preciso Tua mão sempre provê</a:t>
-            </a:r>
-          </a:p>
-        </p:txBody>
-      </p:sp>
-      <p:sp>
-        <p:nvSpPr>
-          <p:cNvPr id="5" name="TextBox 4"/>
-          <p:cNvSpPr txBox="1"/>
-          <p:nvPr/>
-        </p:nvSpPr>
-        <p:spPr>
-          <a:xfrm>
-            <a:off x="594360" y="4251960"/>
-            <a:ext cx="11002975" cy="347472"/>
-          </a:xfrm>
-          <a:prstGeom prst="rect">
-            <a:avLst/>
-          </a:prstGeom>
-          <a:noFill/>
-        </p:spPr>
-        <p:txBody>
-          <a:bodyPr wrap="square">
-            <a:spAutoFit/>
-          </a:bodyPr>
-          <a:lstStyle/>
-          <a:p>
-            <a:pPr algn="ctr"/>
-            <a:r>
-              <a:rPr sz="2200" b="0" i="1">
-                <a:solidFill>
-                  <a:srgbClr val="8C8C8C"/>
-                </a:solidFill>
-                <a:latin typeface="Arial"/>
-              </a:rPr>
-              <a:t/>
             </a:r>
           </a:p>
         </p:txBody>

--- a/output_pptx/Great_Is_Thy_Faithfulness.pptx
+++ b/output_pptx/Great_Is_Thy_Faithfulness.pptx
@@ -3431,6 +3431,76 @@
           </a:p>
         </p:txBody>
       </p:sp>
+      <p:sp>
+        <p:nvSpPr>
+          <p:cNvPr id="4" name="TextBox 3"/>
+          <p:cNvSpPr txBox="1"/>
+          <p:nvPr/>
+        </p:nvSpPr>
+        <p:spPr>
+          <a:xfrm>
+            <a:off x="640080" y="4128516"/>
+            <a:ext cx="10911535" cy="310896"/>
+          </a:xfrm>
+          <a:prstGeom prst="rect">
+            <a:avLst/>
+          </a:prstGeom>
+          <a:noFill/>
+        </p:spPr>
+        <p:txBody>
+          <a:bodyPr wrap="square">
+            <a:spAutoFit/>
+          </a:bodyPr>
+          <a:lstStyle/>
+          <a:p>
+            <a:pPr algn="ctr"/>
+            <a:r>
+              <a:rPr sz="2000" b="0" i="0">
+                <a:solidFill>
+                  <a:srgbClr val="828282"/>
+                </a:solidFill>
+                <a:latin typeface="Arial"/>
+              </a:rPr>
+              <a:t>主よ、あなたの誠実さは偉大です</a:t>
+            </a:r>
+          </a:p>
+        </p:txBody>
+      </p:sp>
+      <p:sp>
+        <p:nvSpPr>
+          <p:cNvPr id="5" name="TextBox 4"/>
+          <p:cNvSpPr txBox="1"/>
+          <p:nvPr/>
+        </p:nvSpPr>
+        <p:spPr>
+          <a:xfrm>
+            <a:off x="640080" y="4494276"/>
+            <a:ext cx="10911535" cy="310896"/>
+          </a:xfrm>
+          <a:prstGeom prst="rect">
+            <a:avLst/>
+          </a:prstGeom>
+          <a:noFill/>
+        </p:spPr>
+        <p:txBody>
+          <a:bodyPr wrap="square">
+            <a:spAutoFit/>
+          </a:bodyPr>
+          <a:lstStyle/>
+          <a:p>
+            <a:pPr algn="ctr"/>
+            <a:r>
+              <a:rPr sz="2000" b="0" i="0">
+                <a:solidFill>
+                  <a:srgbClr val="828282"/>
+                </a:solidFill>
+                <a:latin typeface="Arial"/>
+              </a:rPr>
+              <a:t>あなたの誠実さは偉大です</a:t>
+            </a:r>
+          </a:p>
+        </p:txBody>
+      </p:sp>
     </p:spTree>
   </p:cSld>
   <p:clrMapOvr>
@@ -3492,6 +3562,41 @@
           </a:p>
         </p:txBody>
       </p:sp>
+      <p:sp>
+        <p:nvSpPr>
+          <p:cNvPr id="3" name="TextBox 2"/>
+          <p:cNvSpPr txBox="1"/>
+          <p:nvPr/>
+        </p:nvSpPr>
+        <p:spPr>
+          <a:xfrm>
+            <a:off x="640080" y="3845052"/>
+            <a:ext cx="10911535" cy="310896"/>
+          </a:xfrm>
+          <a:prstGeom prst="rect">
+            <a:avLst/>
+          </a:prstGeom>
+          <a:noFill/>
+        </p:spPr>
+        <p:txBody>
+          <a:bodyPr wrap="square">
+            <a:spAutoFit/>
+          </a:bodyPr>
+          <a:lstStyle/>
+          <a:p>
+            <a:pPr algn="ctr"/>
+            <a:r>
+              <a:rPr sz="2000" b="0" i="0">
+                <a:solidFill>
+                  <a:srgbClr val="828282"/>
+                </a:solidFill>
+                <a:latin typeface="Arial"/>
+              </a:rPr>
+              <a:t>罪の赦しと永遠の平安を</a:t>
+            </a:r>
+          </a:p>
+        </p:txBody>
+      </p:sp>
     </p:spTree>
   </p:cSld>
   <p:clrMapOvr>
@@ -4864,6 +4969,76 @@
           </a:p>
         </p:txBody>
       </p:sp>
+      <p:sp>
+        <p:nvSpPr>
+          <p:cNvPr id="4" name="TextBox 3"/>
+          <p:cNvSpPr txBox="1"/>
+          <p:nvPr/>
+        </p:nvSpPr>
+        <p:spPr>
+          <a:xfrm>
+            <a:off x="640080" y="4128516"/>
+            <a:ext cx="10911535" cy="310896"/>
+          </a:xfrm>
+          <a:prstGeom prst="rect">
+            <a:avLst/>
+          </a:prstGeom>
+          <a:noFill/>
+        </p:spPr>
+        <p:txBody>
+          <a:bodyPr wrap="square">
+            <a:spAutoFit/>
+          </a:bodyPr>
+          <a:lstStyle/>
+          <a:p>
+            <a:pPr algn="ctr"/>
+            <a:r>
+              <a:rPr sz="2000" b="0" i="0">
+                <a:solidFill>
+                  <a:srgbClr val="828282"/>
+                </a:solidFill>
+                <a:latin typeface="Arial"/>
+              </a:rPr>
+              <a:t>あなたの偉大な誠実さ、あわれみ、そして愛へ</a:t>
+            </a:r>
+          </a:p>
+        </p:txBody>
+      </p:sp>
+      <p:sp>
+        <p:nvSpPr>
+          <p:cNvPr id="5" name="TextBox 4"/>
+          <p:cNvSpPr txBox="1"/>
+          <p:nvPr/>
+        </p:nvSpPr>
+        <p:spPr>
+          <a:xfrm>
+            <a:off x="640080" y="4494276"/>
+            <a:ext cx="10911535" cy="310896"/>
+          </a:xfrm>
+          <a:prstGeom prst="rect">
+            <a:avLst/>
+          </a:prstGeom>
+          <a:noFill/>
+        </p:spPr>
+        <p:txBody>
+          <a:bodyPr wrap="square">
+            <a:spAutoFit/>
+          </a:bodyPr>
+          <a:lstStyle/>
+          <a:p>
+            <a:pPr algn="ctr"/>
+            <a:r>
+              <a:rPr sz="2000" b="0" i="0">
+                <a:solidFill>
+                  <a:srgbClr val="828282"/>
+                </a:solidFill>
+                <a:latin typeface="Arial"/>
+              </a:rPr>
+              <a:t>あなたの誠実さは偉大です</a:t>
+            </a:r>
+          </a:p>
+        </p:txBody>
+      </p:sp>
     </p:spTree>
   </p:cSld>
   <p:clrMapOvr>
@@ -5528,6 +5703,76 @@
           </a:p>
         </p:txBody>
       </p:sp>
+      <p:sp>
+        <p:nvSpPr>
+          <p:cNvPr id="4" name="TextBox 3"/>
+          <p:cNvSpPr txBox="1"/>
+          <p:nvPr/>
+        </p:nvSpPr>
+        <p:spPr>
+          <a:xfrm>
+            <a:off x="640080" y="4128516"/>
+            <a:ext cx="10911535" cy="310896"/>
+          </a:xfrm>
+          <a:prstGeom prst="rect">
+            <a:avLst/>
+          </a:prstGeom>
+          <a:noFill/>
+        </p:spPr>
+        <p:txBody>
+          <a:bodyPr wrap="square">
+            <a:spAutoFit/>
+          </a:bodyPr>
+          <a:lstStyle/>
+          <a:p>
+            <a:pPr algn="ctr"/>
+            <a:r>
+              <a:rPr sz="2000" b="0" i="0">
+                <a:solidFill>
+                  <a:srgbClr val="828282"/>
+                </a:solidFill>
+                <a:latin typeface="Arial"/>
+              </a:rPr>
+              <a:t>主よ、あなたの誠実さは偉大です</a:t>
+            </a:r>
+          </a:p>
+        </p:txBody>
+      </p:sp>
+      <p:sp>
+        <p:nvSpPr>
+          <p:cNvPr id="5" name="TextBox 4"/>
+          <p:cNvSpPr txBox="1"/>
+          <p:nvPr/>
+        </p:nvSpPr>
+        <p:spPr>
+          <a:xfrm>
+            <a:off x="640080" y="4494276"/>
+            <a:ext cx="10911535" cy="310896"/>
+          </a:xfrm>
+          <a:prstGeom prst="rect">
+            <a:avLst/>
+          </a:prstGeom>
+          <a:noFill/>
+        </p:spPr>
+        <p:txBody>
+          <a:bodyPr wrap="square">
+            <a:spAutoFit/>
+          </a:bodyPr>
+          <a:lstStyle/>
+          <a:p>
+            <a:pPr algn="ctr"/>
+            <a:r>
+              <a:rPr sz="2000" b="0" i="0">
+                <a:solidFill>
+                  <a:srgbClr val="828282"/>
+                </a:solidFill>
+                <a:latin typeface="Arial"/>
+              </a:rPr>
+              <a:t>あなたの誠実さは偉大です</a:t>
+            </a:r>
+          </a:p>
+        </p:txBody>
+      </p:sp>
     </p:spTree>
   </p:cSld>
   <p:clrMapOvr>
@@ -5624,6 +5869,76 @@
           </a:p>
         </p:txBody>
       </p:sp>
+      <p:sp>
+        <p:nvSpPr>
+          <p:cNvPr id="4" name="TextBox 3"/>
+          <p:cNvSpPr txBox="1"/>
+          <p:nvPr/>
+        </p:nvSpPr>
+        <p:spPr>
+          <a:xfrm>
+            <a:off x="640080" y="4128516"/>
+            <a:ext cx="10911535" cy="310896"/>
+          </a:xfrm>
+          <a:prstGeom prst="rect">
+            <a:avLst/>
+          </a:prstGeom>
+          <a:noFill/>
+        </p:spPr>
+        <p:txBody>
+          <a:bodyPr wrap="square">
+            <a:spAutoFit/>
+          </a:bodyPr>
+          <a:lstStyle/>
+          <a:p>
+            <a:pPr algn="ctr"/>
+            <a:r>
+              <a:rPr sz="2000" b="0" i="0">
+                <a:solidFill>
+                  <a:srgbClr val="828282"/>
+                </a:solidFill>
+                <a:latin typeface="Arial"/>
+              </a:rPr>
+              <a:t>朝ごとに新しいあわれみを見いだします</a:t>
+            </a:r>
+          </a:p>
+        </p:txBody>
+      </p:sp>
+      <p:sp>
+        <p:nvSpPr>
+          <p:cNvPr id="5" name="TextBox 4"/>
+          <p:cNvSpPr txBox="1"/>
+          <p:nvPr/>
+        </p:nvSpPr>
+        <p:spPr>
+          <a:xfrm>
+            <a:off x="640080" y="4494276"/>
+            <a:ext cx="10911535" cy="310896"/>
+          </a:xfrm>
+          <a:prstGeom prst="rect">
+            <a:avLst/>
+          </a:prstGeom>
+          <a:noFill/>
+        </p:spPr>
+        <p:txBody>
+          <a:bodyPr wrap="square">
+            <a:spAutoFit/>
+          </a:bodyPr>
+          <a:lstStyle/>
+          <a:p>
+            <a:pPr algn="ctr"/>
+            <a:r>
+              <a:rPr sz="2000" b="0" i="0">
+                <a:solidFill>
+                  <a:srgbClr val="828282"/>
+                </a:solidFill>
+                <a:latin typeface="Arial"/>
+              </a:rPr>
+              <a:t>必要なすべてをあなたの手はいつも与えてくれます</a:t>
+            </a:r>
+          </a:p>
+        </p:txBody>
+      </p:sp>
     </p:spTree>
   </p:cSld>
   <p:clrMapOvr>
@@ -5720,6 +6035,76 @@
           </a:p>
         </p:txBody>
       </p:sp>
+      <p:sp>
+        <p:nvSpPr>
+          <p:cNvPr id="4" name="TextBox 3"/>
+          <p:cNvSpPr txBox="1"/>
+          <p:nvPr/>
+        </p:nvSpPr>
+        <p:spPr>
+          <a:xfrm>
+            <a:off x="640080" y="4128516"/>
+            <a:ext cx="10911535" cy="310896"/>
+          </a:xfrm>
+          <a:prstGeom prst="rect">
+            <a:avLst/>
+          </a:prstGeom>
+          <a:noFill/>
+        </p:spPr>
+        <p:txBody>
+          <a:bodyPr wrap="square">
+            <a:spAutoFit/>
+          </a:bodyPr>
+          <a:lstStyle/>
+          <a:p>
+            <a:pPr algn="ctr"/>
+            <a:r>
+              <a:rPr sz="2000" b="0" i="0">
+                <a:solidFill>
+                  <a:srgbClr val="828282"/>
+                </a:solidFill>
+                <a:latin typeface="Arial"/>
+              </a:rPr>
+              <a:t>主よ、あなたの誠実さは偉大です</a:t>
+            </a:r>
+          </a:p>
+        </p:txBody>
+      </p:sp>
+      <p:sp>
+        <p:nvSpPr>
+          <p:cNvPr id="5" name="TextBox 4"/>
+          <p:cNvSpPr txBox="1"/>
+          <p:nvPr/>
+        </p:nvSpPr>
+        <p:spPr>
+          <a:xfrm>
+            <a:off x="640080" y="4494276"/>
+            <a:ext cx="10911535" cy="310896"/>
+          </a:xfrm>
+          <a:prstGeom prst="rect">
+            <a:avLst/>
+          </a:prstGeom>
+          <a:noFill/>
+        </p:spPr>
+        <p:txBody>
+          <a:bodyPr wrap="square">
+            <a:spAutoFit/>
+          </a:bodyPr>
+          <a:lstStyle/>
+          <a:p>
+            <a:pPr algn="ctr"/>
+            <a:r>
+              <a:rPr sz="2000" b="0" i="0">
+                <a:solidFill>
+                  <a:srgbClr val="828282"/>
+                </a:solidFill>
+                <a:latin typeface="Arial"/>
+              </a:rPr>
+              <a:t>あなたの誠実さは偉大です</a:t>
+            </a:r>
+          </a:p>
+        </p:txBody>
+      </p:sp>
     </p:spTree>
   </p:cSld>
   <p:clrMapOvr>
@@ -5781,6 +6166,41 @@
           </a:p>
         </p:txBody>
       </p:sp>
+      <p:sp>
+        <p:nvSpPr>
+          <p:cNvPr id="3" name="TextBox 2"/>
+          <p:cNvSpPr txBox="1"/>
+          <p:nvPr/>
+        </p:nvSpPr>
+        <p:spPr>
+          <a:xfrm>
+            <a:off x="640080" y="3845052"/>
+            <a:ext cx="10911535" cy="310896"/>
+          </a:xfrm>
+          <a:prstGeom prst="rect">
+            <a:avLst/>
+          </a:prstGeom>
+          <a:noFill/>
+        </p:spPr>
+        <p:txBody>
+          <a:bodyPr wrap="square">
+            <a:spAutoFit/>
+          </a:bodyPr>
+          <a:lstStyle/>
+          <a:p>
+            <a:pPr algn="ctr"/>
+            <a:r>
+              <a:rPr sz="2000" b="0" i="0">
+                <a:solidFill>
+                  <a:srgbClr val="828282"/>
+                </a:solidFill>
+                <a:latin typeface="Arial"/>
+              </a:rPr>
+              <a:t>罪の赦しと永遠の平安を</a:t>
+            </a:r>
+          </a:p>
+        </p:txBody>
+      </p:sp>
     </p:spTree>
   </p:cSld>
   <p:clrMapOvr>
@@ -6209,6 +6629,76 @@
           </a:p>
         </p:txBody>
       </p:sp>
+      <p:sp>
+        <p:nvSpPr>
+          <p:cNvPr id="4" name="TextBox 3"/>
+          <p:cNvSpPr txBox="1"/>
+          <p:nvPr/>
+        </p:nvSpPr>
+        <p:spPr>
+          <a:xfrm>
+            <a:off x="640080" y="4128516"/>
+            <a:ext cx="10911535" cy="310896"/>
+          </a:xfrm>
+          <a:prstGeom prst="rect">
+            <a:avLst/>
+          </a:prstGeom>
+          <a:noFill/>
+        </p:spPr>
+        <p:txBody>
+          <a:bodyPr wrap="square">
+            <a:spAutoFit/>
+          </a:bodyPr>
+          <a:lstStyle/>
+          <a:p>
+            <a:pPr algn="ctr"/>
+            <a:r>
+              <a:rPr sz="2000" b="0" i="0">
+                <a:solidFill>
+                  <a:srgbClr val="828282"/>
+                </a:solidFill>
+                <a:latin typeface="Arial"/>
+              </a:rPr>
+              <a:t>主よ、あなたの誠実さは偉大です</a:t>
+            </a:r>
+          </a:p>
+        </p:txBody>
+      </p:sp>
+      <p:sp>
+        <p:nvSpPr>
+          <p:cNvPr id="5" name="TextBox 4"/>
+          <p:cNvSpPr txBox="1"/>
+          <p:nvPr/>
+        </p:nvSpPr>
+        <p:spPr>
+          <a:xfrm>
+            <a:off x="640080" y="4494276"/>
+            <a:ext cx="10911535" cy="310896"/>
+          </a:xfrm>
+          <a:prstGeom prst="rect">
+            <a:avLst/>
+          </a:prstGeom>
+          <a:noFill/>
+        </p:spPr>
+        <p:txBody>
+          <a:bodyPr wrap="square">
+            <a:spAutoFit/>
+          </a:bodyPr>
+          <a:lstStyle/>
+          <a:p>
+            <a:pPr algn="ctr"/>
+            <a:r>
+              <a:rPr sz="2000" b="0" i="0">
+                <a:solidFill>
+                  <a:srgbClr val="828282"/>
+                </a:solidFill>
+                <a:latin typeface="Arial"/>
+              </a:rPr>
+              <a:t>あなたの誠実さは偉大です</a:t>
+            </a:r>
+          </a:p>
+        </p:txBody>
+      </p:sp>
     </p:spTree>
   </p:cSld>
   <p:clrMapOvr>
@@ -6305,6 +6795,76 @@
           </a:p>
         </p:txBody>
       </p:sp>
+      <p:sp>
+        <p:nvSpPr>
+          <p:cNvPr id="4" name="TextBox 3"/>
+          <p:cNvSpPr txBox="1"/>
+          <p:nvPr/>
+        </p:nvSpPr>
+        <p:spPr>
+          <a:xfrm>
+            <a:off x="640080" y="4128516"/>
+            <a:ext cx="10911535" cy="310896"/>
+          </a:xfrm>
+          <a:prstGeom prst="rect">
+            <a:avLst/>
+          </a:prstGeom>
+          <a:noFill/>
+        </p:spPr>
+        <p:txBody>
+          <a:bodyPr wrap="square">
+            <a:spAutoFit/>
+          </a:bodyPr>
+          <a:lstStyle/>
+          <a:p>
+            <a:pPr algn="ctr"/>
+            <a:r>
+              <a:rPr sz="2000" b="0" i="0">
+                <a:solidFill>
+                  <a:srgbClr val="828282"/>
+                </a:solidFill>
+                <a:latin typeface="Arial"/>
+              </a:rPr>
+              <a:t>朝ごとに新しいあわれみを見いだします</a:t>
+            </a:r>
+          </a:p>
+        </p:txBody>
+      </p:sp>
+      <p:sp>
+        <p:nvSpPr>
+          <p:cNvPr id="5" name="TextBox 4"/>
+          <p:cNvSpPr txBox="1"/>
+          <p:nvPr/>
+        </p:nvSpPr>
+        <p:spPr>
+          <a:xfrm>
+            <a:off x="640080" y="4494276"/>
+            <a:ext cx="10911535" cy="310896"/>
+          </a:xfrm>
+          <a:prstGeom prst="rect">
+            <a:avLst/>
+          </a:prstGeom>
+          <a:noFill/>
+        </p:spPr>
+        <p:txBody>
+          <a:bodyPr wrap="square">
+            <a:spAutoFit/>
+          </a:bodyPr>
+          <a:lstStyle/>
+          <a:p>
+            <a:pPr algn="ctr"/>
+            <a:r>
+              <a:rPr sz="2000" b="0" i="0">
+                <a:solidFill>
+                  <a:srgbClr val="828282"/>
+                </a:solidFill>
+                <a:latin typeface="Arial"/>
+              </a:rPr>
+              <a:t>必要なすべてをあなたの手はいつも与えてくれます</a:t>
+            </a:r>
+          </a:p>
+        </p:txBody>
+      </p:sp>
     </p:spTree>
   </p:cSld>
   <p:clrMapOvr>
@@ -6401,6 +6961,76 @@
           </a:p>
         </p:txBody>
       </p:sp>
+      <p:sp>
+        <p:nvSpPr>
+          <p:cNvPr id="4" name="TextBox 3"/>
+          <p:cNvSpPr txBox="1"/>
+          <p:nvPr/>
+        </p:nvSpPr>
+        <p:spPr>
+          <a:xfrm>
+            <a:off x="640080" y="4128516"/>
+            <a:ext cx="10911535" cy="310896"/>
+          </a:xfrm>
+          <a:prstGeom prst="rect">
+            <a:avLst/>
+          </a:prstGeom>
+          <a:noFill/>
+        </p:spPr>
+        <p:txBody>
+          <a:bodyPr wrap="square">
+            <a:spAutoFit/>
+          </a:bodyPr>
+          <a:lstStyle/>
+          <a:p>
+            <a:pPr algn="ctr"/>
+            <a:r>
+              <a:rPr sz="2000" b="0" i="0">
+                <a:solidFill>
+                  <a:srgbClr val="828282"/>
+                </a:solidFill>
+                <a:latin typeface="Arial"/>
+              </a:rPr>
+              <a:t>主よ、あなたの誠実さは偉大です</a:t>
+            </a:r>
+          </a:p>
+        </p:txBody>
+      </p:sp>
+      <p:sp>
+        <p:nvSpPr>
+          <p:cNvPr id="5" name="TextBox 4"/>
+          <p:cNvSpPr txBox="1"/>
+          <p:nvPr/>
+        </p:nvSpPr>
+        <p:spPr>
+          <a:xfrm>
+            <a:off x="640080" y="4494276"/>
+            <a:ext cx="10911535" cy="310896"/>
+          </a:xfrm>
+          <a:prstGeom prst="rect">
+            <a:avLst/>
+          </a:prstGeom>
+          <a:noFill/>
+        </p:spPr>
+        <p:txBody>
+          <a:bodyPr wrap="square">
+            <a:spAutoFit/>
+          </a:bodyPr>
+          <a:lstStyle/>
+          <a:p>
+            <a:pPr algn="ctr"/>
+            <a:r>
+              <a:rPr sz="2000" b="0" i="0">
+                <a:solidFill>
+                  <a:srgbClr val="828282"/>
+                </a:solidFill>
+                <a:latin typeface="Arial"/>
+              </a:rPr>
+              <a:t>あなたの誠実さは偉大です</a:t>
+            </a:r>
+          </a:p>
+        </p:txBody>
+      </p:sp>
     </p:spTree>
   </p:cSld>
   <p:clrMapOvr>
@@ -6628,6 +7258,41 @@
           </a:p>
         </p:txBody>
       </p:sp>
+      <p:sp>
+        <p:nvSpPr>
+          <p:cNvPr id="3" name="TextBox 2"/>
+          <p:cNvSpPr txBox="1"/>
+          <p:nvPr/>
+        </p:nvSpPr>
+        <p:spPr>
+          <a:xfrm>
+            <a:off x="640080" y="3845052"/>
+            <a:ext cx="10911535" cy="310896"/>
+          </a:xfrm>
+          <a:prstGeom prst="rect">
+            <a:avLst/>
+          </a:prstGeom>
+          <a:noFill/>
+        </p:spPr>
+        <p:txBody>
+          <a:bodyPr wrap="square">
+            <a:spAutoFit/>
+          </a:bodyPr>
+          <a:lstStyle/>
+          <a:p>
+            <a:pPr algn="ctr"/>
+            <a:r>
+              <a:rPr sz="2000" b="0" i="0">
+                <a:solidFill>
+                  <a:srgbClr val="828282"/>
+                </a:solidFill>
+                <a:latin typeface="Arial"/>
+              </a:rPr>
+              <a:t>罪の赦しと永遠の平安を</a:t>
+            </a:r>
+          </a:p>
+        </p:txBody>
+      </p:sp>
     </p:spTree>
   </p:cSld>
   <p:clrMapOvr>
@@ -6855,6 +7520,41 @@
           </a:p>
         </p:txBody>
       </p:sp>
+      <p:sp>
+        <p:nvSpPr>
+          <p:cNvPr id="3" name="TextBox 2"/>
+          <p:cNvSpPr txBox="1"/>
+          <p:nvPr/>
+        </p:nvSpPr>
+        <p:spPr>
+          <a:xfrm>
+            <a:off x="640080" y="3845052"/>
+            <a:ext cx="10911535" cy="310896"/>
+          </a:xfrm>
+          <a:prstGeom prst="rect">
+            <a:avLst/>
+          </a:prstGeom>
+          <a:noFill/>
+        </p:spPr>
+        <p:txBody>
+          <a:bodyPr wrap="square">
+            <a:spAutoFit/>
+          </a:bodyPr>
+          <a:lstStyle/>
+          <a:p>
+            <a:pPr algn="ctr"/>
+            <a:r>
+              <a:rPr sz="2000" b="0" i="0">
+                <a:solidFill>
+                  <a:srgbClr val="828282"/>
+                </a:solidFill>
+                <a:latin typeface="Arial"/>
+              </a:rPr>
+              <a:t>あなたの誠実さは決して失われることはありません</a:t>
+            </a:r>
+          </a:p>
+        </p:txBody>
+      </p:sp>
     </p:spTree>
   </p:cSld>
   <p:clrMapOvr>
@@ -7283,6 +7983,76 @@
           </a:p>
         </p:txBody>
       </p:sp>
+      <p:sp>
+        <p:nvSpPr>
+          <p:cNvPr id="4" name="TextBox 3"/>
+          <p:cNvSpPr txBox="1"/>
+          <p:nvPr/>
+        </p:nvSpPr>
+        <p:spPr>
+          <a:xfrm>
+            <a:off x="640080" y="4128516"/>
+            <a:ext cx="10911535" cy="310896"/>
+          </a:xfrm>
+          <a:prstGeom prst="rect">
+            <a:avLst/>
+          </a:prstGeom>
+          <a:noFill/>
+        </p:spPr>
+        <p:txBody>
+          <a:bodyPr wrap="square">
+            <a:spAutoFit/>
+          </a:bodyPr>
+          <a:lstStyle/>
+          <a:p>
+            <a:pPr algn="ctr"/>
+            <a:r>
+              <a:rPr sz="2000" b="0" i="0">
+                <a:solidFill>
+                  <a:srgbClr val="828282"/>
+                </a:solidFill>
+                <a:latin typeface="Arial"/>
+              </a:rPr>
+              <a:t>主よ、あなたの誠実さは偉大です</a:t>
+            </a:r>
+          </a:p>
+        </p:txBody>
+      </p:sp>
+      <p:sp>
+        <p:nvSpPr>
+          <p:cNvPr id="5" name="TextBox 4"/>
+          <p:cNvSpPr txBox="1"/>
+          <p:nvPr/>
+        </p:nvSpPr>
+        <p:spPr>
+          <a:xfrm>
+            <a:off x="640080" y="4494276"/>
+            <a:ext cx="10911535" cy="310896"/>
+          </a:xfrm>
+          <a:prstGeom prst="rect">
+            <a:avLst/>
+          </a:prstGeom>
+          <a:noFill/>
+        </p:spPr>
+        <p:txBody>
+          <a:bodyPr wrap="square">
+            <a:spAutoFit/>
+          </a:bodyPr>
+          <a:lstStyle/>
+          <a:p>
+            <a:pPr algn="ctr"/>
+            <a:r>
+              <a:rPr sz="2000" b="0" i="0">
+                <a:solidFill>
+                  <a:srgbClr val="828282"/>
+                </a:solidFill>
+                <a:latin typeface="Arial"/>
+              </a:rPr>
+              <a:t>あなたの誠実さは偉大です</a:t>
+            </a:r>
+          </a:p>
+        </p:txBody>
+      </p:sp>
     </p:spTree>
   </p:cSld>
   <p:clrMapOvr>
@@ -7375,6 +8145,76 @@
                 <a:latin typeface="Arial"/>
               </a:rPr>
               <a:t>Tudo que preciso Tua mão sempre provê</a:t>
+            </a:r>
+          </a:p>
+        </p:txBody>
+      </p:sp>
+      <p:sp>
+        <p:nvSpPr>
+          <p:cNvPr id="4" name="TextBox 3"/>
+          <p:cNvSpPr txBox="1"/>
+          <p:nvPr/>
+        </p:nvSpPr>
+        <p:spPr>
+          <a:xfrm>
+            <a:off x="640080" y="4128516"/>
+            <a:ext cx="10911535" cy="310896"/>
+          </a:xfrm>
+          <a:prstGeom prst="rect">
+            <a:avLst/>
+          </a:prstGeom>
+          <a:noFill/>
+        </p:spPr>
+        <p:txBody>
+          <a:bodyPr wrap="square">
+            <a:spAutoFit/>
+          </a:bodyPr>
+          <a:lstStyle/>
+          <a:p>
+            <a:pPr algn="ctr"/>
+            <a:r>
+              <a:rPr sz="2000" b="0" i="0">
+                <a:solidFill>
+                  <a:srgbClr val="828282"/>
+                </a:solidFill>
+                <a:latin typeface="Arial"/>
+              </a:rPr>
+              <a:t>朝ごとに新しいあわれみを見いだします</a:t>
+            </a:r>
+          </a:p>
+        </p:txBody>
+      </p:sp>
+      <p:sp>
+        <p:nvSpPr>
+          <p:cNvPr id="5" name="TextBox 4"/>
+          <p:cNvSpPr txBox="1"/>
+          <p:nvPr/>
+        </p:nvSpPr>
+        <p:spPr>
+          <a:xfrm>
+            <a:off x="640080" y="4494276"/>
+            <a:ext cx="10911535" cy="310896"/>
+          </a:xfrm>
+          <a:prstGeom prst="rect">
+            <a:avLst/>
+          </a:prstGeom>
+          <a:noFill/>
+        </p:spPr>
+        <p:txBody>
+          <a:bodyPr wrap="square">
+            <a:spAutoFit/>
+          </a:bodyPr>
+          <a:lstStyle/>
+          <a:p>
+            <a:pPr algn="ctr"/>
+            <a:r>
+              <a:rPr sz="2000" b="0" i="0">
+                <a:solidFill>
+                  <a:srgbClr val="828282"/>
+                </a:solidFill>
+                <a:latin typeface="Arial"/>
+              </a:rPr>
+              <a:t>必要なすべてをあなたの手はいつも与えてくれます</a:t>
             </a:r>
           </a:p>
         </p:txBody>
